--- a/presentation/core-strategies-categorization.pptx
+++ b/presentation/core-strategies-categorization.pptx
@@ -9,6 +9,7 @@
     <p:sldId id="257" r:id="rId8"/>
     <p:sldId id="258" r:id="rId9"/>
     <p:sldId id="259" r:id="rId10"/>
+    <p:sldId id="260" r:id="rId11"/>
   </p:sldIdLst>
   <p:notesMasterIdLst>
     <p:notesMasterId r:id="rId18"/>
@@ -7438,7 +7439,7 @@
                 </a:solidFill>
                 <a:latin typeface="맑은 고딕"/>
               </a:rPr>
-              <a:t>1 / 4</a:t>
+              <a:t>1 / 5</a:t>
             </a:r>
           </a:p>
         </p:txBody>
@@ -9514,7 +9515,7 @@
                 </a:solidFill>
                 <a:latin typeface="맑은 고딕"/>
               </a:rPr>
-              <a:t>2 / 4</a:t>
+              <a:t>2 / 5</a:t>
             </a:r>
           </a:p>
         </p:txBody>
@@ -11440,7 +11441,7 @@
                 </a:solidFill>
                 <a:latin typeface="맑은 고딕"/>
               </a:rPr>
-              <a:t>3 / 4</a:t>
+              <a:t>3 / 5</a:t>
             </a:r>
           </a:p>
         </p:txBody>
@@ -13566,7 +13567,5234 @@
                 </a:solidFill>
                 <a:latin typeface="맑은 고딕"/>
               </a:rPr>
-              <a:t>4 / 4</a:t>
+              <a:t>4 / 5</a:t>
+            </a:r>
+          </a:p>
+        </p:txBody>
+      </p:sp>
+    </p:spTree>
+  </p:cSld>
+  <p:clrMapOvr>
+    <a:masterClrMapping/>
+  </p:clrMapOvr>
+</p:sld>
+</file>
+
+<file path=ppt/slides/slide5.xml><?xml version="1.0" encoding="utf-8"?>
+<p:sld xmlns:a="http://schemas.openxmlformats.org/drawingml/2006/main" xmlns:p="http://schemas.openxmlformats.org/presentationml/2006/main" xmlns:r="http://schemas.openxmlformats.org/officeDocument/2006/relationships">
+  <p:cSld>
+    <p:spTree>
+      <p:nvGrpSpPr>
+        <p:cNvPr id="1" name=""/>
+        <p:cNvGrpSpPr/>
+        <p:nvPr/>
+      </p:nvGrpSpPr>
+      <p:grpSpPr/>
+      <p:sp>
+        <p:nvSpPr>
+          <p:cNvPr id="2" name="TextBox 1"/>
+          <p:cNvSpPr txBox="1"/>
+          <p:nvPr/>
+        </p:nvSpPr>
+        <p:spPr>
+          <a:xfrm>
+            <a:off x="457200" y="365760"/>
+            <a:ext cx="11731752" cy="640080"/>
+          </a:xfrm>
+          <a:prstGeom prst="rect">
+            <a:avLst/>
+          </a:prstGeom>
+          <a:noFill/>
+        </p:spPr>
+        <p:txBody>
+          <a:bodyPr wrap="square" lIns="0" rIns="0" tIns="0" bIns="0" anchor="t">
+            <a:spAutoFit/>
+          </a:bodyPr>
+          <a:lstStyle/>
+          <a:p>
+            <a:pPr algn="l"/>
+            <a:r>
+              <a:rPr sz="2200" b="1" i="0">
+                <a:solidFill>
+                  <a:srgbClr val="1A1A1A"/>
+                </a:solidFill>
+                <a:latin typeface="맑은 고딕"/>
+              </a:rPr>
+              <a:t>부록 · 10개 전략 현황 요약 — 우리는 지금 어디에 있는가</a:t>
+            </a:r>
+          </a:p>
+        </p:txBody>
+      </p:sp>
+      <p:sp>
+        <p:nvSpPr>
+          <p:cNvPr id="3" name="TextBox 2"/>
+          <p:cNvSpPr txBox="1"/>
+          <p:nvPr/>
+        </p:nvSpPr>
+        <p:spPr>
+          <a:xfrm>
+            <a:off x="457200" y="960120"/>
+            <a:ext cx="11731752" cy="365760"/>
+          </a:xfrm>
+          <a:prstGeom prst="rect">
+            <a:avLst/>
+          </a:prstGeom>
+          <a:noFill/>
+        </p:spPr>
+        <p:txBody>
+          <a:bodyPr wrap="square" lIns="0" rIns="0" tIns="0" bIns="0" anchor="t">
+            <a:spAutoFit/>
+          </a:bodyPr>
+          <a:lstStyle/>
+          <a:p>
+            <a:pPr algn="l"/>
+            <a:r>
+              <a:rPr sz="1200" b="0" i="0">
+                <a:solidFill>
+                  <a:srgbClr val="6B7280"/>
+                </a:solidFill>
+                <a:latin typeface="맑은 고딕"/>
+              </a:rPr>
+              <a:t>외부 공개 자료(IR·산업 리포트·뉴스)만으로 정성·정량 분석. ✅ 확정 / 🔵 추정 / ⚠️ 정보 공백</a:t>
+            </a:r>
+          </a:p>
+        </p:txBody>
+      </p:sp>
+      <p:cxnSp>
+        <p:nvCxnSpPr>
+          <p:cNvPr id="4" name="Connector 3"/>
+          <p:cNvCxnSpPr/>
+          <p:nvPr/>
+        </p:nvCxnSpPr>
+        <p:spPr>
+          <a:xfrm>
+            <a:off x="457200" y="1417320"/>
+            <a:ext cx="11274552" cy="0"/>
+          </a:xfrm>
+          <a:prstGeom prst="line">
+            <a:avLst/>
+          </a:prstGeom>
+          <a:ln w="6350">
+            <a:solidFill>
+              <a:srgbClr val="D1D5DB"/>
+            </a:solidFill>
+          </a:ln>
+        </p:spPr>
+        <p:style>
+          <a:lnRef idx="2">
+            <a:schemeClr val="accent1"/>
+          </a:lnRef>
+          <a:fillRef idx="0">
+            <a:schemeClr val="accent1"/>
+          </a:fillRef>
+          <a:effectRef idx="1">
+            <a:schemeClr val="accent1"/>
+          </a:effectRef>
+          <a:fontRef idx="minor">
+            <a:schemeClr val="tx1"/>
+          </a:fontRef>
+        </p:style>
+      </p:cxnSp>
+      <p:sp>
+        <p:nvSpPr>
+          <p:cNvPr id="5" name="Rectangle 4"/>
+          <p:cNvSpPr/>
+          <p:nvPr/>
+        </p:nvSpPr>
+        <p:spPr>
+          <a:xfrm>
+            <a:off x="365760" y="1691640"/>
+            <a:ext cx="640080" cy="411480"/>
+          </a:xfrm>
+          <a:prstGeom prst="rect">
+            <a:avLst/>
+          </a:prstGeom>
+          <a:solidFill>
+            <a:srgbClr val="1428A0"/>
+          </a:solidFill>
+          <a:ln>
+            <a:noFill/>
+          </a:ln>
+          <a:effectLst/>
+        </p:spPr>
+        <p:style>
+          <a:lnRef idx="1">
+            <a:schemeClr val="accent1"/>
+          </a:lnRef>
+          <a:fillRef idx="3">
+            <a:schemeClr val="accent1"/>
+          </a:fillRef>
+          <a:effectRef idx="2">
+            <a:schemeClr val="accent1"/>
+          </a:effectRef>
+          <a:fontRef idx="minor">
+            <a:schemeClr val="lt1"/>
+          </a:fontRef>
+        </p:style>
+        <p:txBody>
+          <a:bodyPr rtlCol="0" anchor="ctr" lIns="0" rIns="0" tIns="0" bIns="0"/>
+          <a:lstStyle/>
+          <a:p>
+            <a:pPr algn="ctr"/>
+          </a:p>
+        </p:txBody>
+      </p:sp>
+      <p:sp>
+        <p:nvSpPr>
+          <p:cNvPr id="6" name="TextBox 5"/>
+          <p:cNvSpPr txBox="1"/>
+          <p:nvPr/>
+        </p:nvSpPr>
+        <p:spPr>
+          <a:xfrm>
+            <a:off x="438912" y="1764792"/>
+            <a:ext cx="493776" cy="274320"/>
+          </a:xfrm>
+          <a:prstGeom prst="rect">
+            <a:avLst/>
+          </a:prstGeom>
+          <a:noFill/>
+        </p:spPr>
+        <p:txBody>
+          <a:bodyPr wrap="square" lIns="0" rIns="0" tIns="0" bIns="0" anchor="t">
+            <a:spAutoFit/>
+          </a:bodyPr>
+          <a:lstStyle/>
+          <a:p>
+            <a:pPr algn="ctr"/>
+            <a:r>
+              <a:rPr sz="1000" b="1" i="0">
+                <a:solidFill>
+                  <a:srgbClr val="FFFFFF"/>
+                </a:solidFill>
+                <a:latin typeface="맑은 고딕"/>
+              </a:rPr>
+              <a:t>ID</a:t>
+            </a:r>
+          </a:p>
+        </p:txBody>
+      </p:sp>
+      <p:sp>
+        <p:nvSpPr>
+          <p:cNvPr id="7" name="Rectangle 6"/>
+          <p:cNvSpPr/>
+          <p:nvPr/>
+        </p:nvSpPr>
+        <p:spPr>
+          <a:xfrm>
+            <a:off x="1005840" y="1691640"/>
+            <a:ext cx="2377440" cy="411480"/>
+          </a:xfrm>
+          <a:prstGeom prst="rect">
+            <a:avLst/>
+          </a:prstGeom>
+          <a:solidFill>
+            <a:srgbClr val="1428A0"/>
+          </a:solidFill>
+          <a:ln>
+            <a:noFill/>
+          </a:ln>
+          <a:effectLst/>
+        </p:spPr>
+        <p:style>
+          <a:lnRef idx="1">
+            <a:schemeClr val="accent1"/>
+          </a:lnRef>
+          <a:fillRef idx="3">
+            <a:schemeClr val="accent1"/>
+          </a:fillRef>
+          <a:effectRef idx="2">
+            <a:schemeClr val="accent1"/>
+          </a:effectRef>
+          <a:fontRef idx="minor">
+            <a:schemeClr val="lt1"/>
+          </a:fontRef>
+        </p:style>
+        <p:txBody>
+          <a:bodyPr rtlCol="0" anchor="ctr" lIns="0" rIns="0" tIns="0" bIns="0"/>
+          <a:lstStyle/>
+          <a:p>
+            <a:pPr algn="ctr"/>
+          </a:p>
+        </p:txBody>
+      </p:sp>
+      <p:sp>
+        <p:nvSpPr>
+          <p:cNvPr id="8" name="TextBox 7"/>
+          <p:cNvSpPr txBox="1"/>
+          <p:nvPr/>
+        </p:nvSpPr>
+        <p:spPr>
+          <a:xfrm>
+            <a:off x="1078992" y="1764792"/>
+            <a:ext cx="2231136" cy="274320"/>
+          </a:xfrm>
+          <a:prstGeom prst="rect">
+            <a:avLst/>
+          </a:prstGeom>
+          <a:noFill/>
+        </p:spPr>
+        <p:txBody>
+          <a:bodyPr wrap="square" lIns="0" rIns="0" tIns="0" bIns="0" anchor="t">
+            <a:spAutoFit/>
+          </a:bodyPr>
+          <a:lstStyle/>
+          <a:p>
+            <a:pPr algn="l"/>
+            <a:r>
+              <a:rPr sz="1000" b="1" i="0">
+                <a:solidFill>
+                  <a:srgbClr val="FFFFFF"/>
+                </a:solidFill>
+                <a:latin typeface="맑은 고딕"/>
+              </a:rPr>
+              <a:t>전략</a:t>
+            </a:r>
+          </a:p>
+        </p:txBody>
+      </p:sp>
+      <p:sp>
+        <p:nvSpPr>
+          <p:cNvPr id="9" name="Rectangle 8"/>
+          <p:cNvSpPr/>
+          <p:nvPr/>
+        </p:nvSpPr>
+        <p:spPr>
+          <a:xfrm>
+            <a:off x="3383280" y="1691640"/>
+            <a:ext cx="4023360" cy="411480"/>
+          </a:xfrm>
+          <a:prstGeom prst="rect">
+            <a:avLst/>
+          </a:prstGeom>
+          <a:solidFill>
+            <a:srgbClr val="1428A0"/>
+          </a:solidFill>
+          <a:ln>
+            <a:noFill/>
+          </a:ln>
+          <a:effectLst/>
+        </p:spPr>
+        <p:style>
+          <a:lnRef idx="1">
+            <a:schemeClr val="accent1"/>
+          </a:lnRef>
+          <a:fillRef idx="3">
+            <a:schemeClr val="accent1"/>
+          </a:fillRef>
+          <a:effectRef idx="2">
+            <a:schemeClr val="accent1"/>
+          </a:effectRef>
+          <a:fontRef idx="minor">
+            <a:schemeClr val="lt1"/>
+          </a:fontRef>
+        </p:style>
+        <p:txBody>
+          <a:bodyPr rtlCol="0" anchor="ctr" lIns="0" rIns="0" tIns="0" bIns="0"/>
+          <a:lstStyle/>
+          <a:p>
+            <a:pPr algn="ctr"/>
+          </a:p>
+        </p:txBody>
+      </p:sp>
+      <p:sp>
+        <p:nvSpPr>
+          <p:cNvPr id="10" name="TextBox 9"/>
+          <p:cNvSpPr txBox="1"/>
+          <p:nvPr/>
+        </p:nvSpPr>
+        <p:spPr>
+          <a:xfrm>
+            <a:off x="3456432" y="1764792"/>
+            <a:ext cx="3877056" cy="274320"/>
+          </a:xfrm>
+          <a:prstGeom prst="rect">
+            <a:avLst/>
+          </a:prstGeom>
+          <a:noFill/>
+        </p:spPr>
+        <p:txBody>
+          <a:bodyPr wrap="square" lIns="0" rIns="0" tIns="0" bIns="0" anchor="t">
+            <a:spAutoFit/>
+          </a:bodyPr>
+          <a:lstStyle/>
+          <a:p>
+            <a:pPr algn="l"/>
+            <a:r>
+              <a:rPr sz="1000" b="1" i="0">
+                <a:solidFill>
+                  <a:srgbClr val="FFFFFF"/>
+                </a:solidFill>
+                <a:latin typeface="맑은 고딕"/>
+              </a:rPr>
+              <a:t>현재 위치</a:t>
+            </a:r>
+          </a:p>
+        </p:txBody>
+      </p:sp>
+      <p:sp>
+        <p:nvSpPr>
+          <p:cNvPr id="11" name="Rectangle 10"/>
+          <p:cNvSpPr/>
+          <p:nvPr/>
+        </p:nvSpPr>
+        <p:spPr>
+          <a:xfrm>
+            <a:off x="7406640" y="1691640"/>
+            <a:ext cx="3291840" cy="411480"/>
+          </a:xfrm>
+          <a:prstGeom prst="rect">
+            <a:avLst/>
+          </a:prstGeom>
+          <a:solidFill>
+            <a:srgbClr val="1428A0"/>
+          </a:solidFill>
+          <a:ln>
+            <a:noFill/>
+          </a:ln>
+          <a:effectLst/>
+        </p:spPr>
+        <p:style>
+          <a:lnRef idx="1">
+            <a:schemeClr val="accent1"/>
+          </a:lnRef>
+          <a:fillRef idx="3">
+            <a:schemeClr val="accent1"/>
+          </a:fillRef>
+          <a:effectRef idx="2">
+            <a:schemeClr val="accent1"/>
+          </a:effectRef>
+          <a:fontRef idx="minor">
+            <a:schemeClr val="lt1"/>
+          </a:fontRef>
+        </p:style>
+        <p:txBody>
+          <a:bodyPr rtlCol="0" anchor="ctr" lIns="0" rIns="0" tIns="0" bIns="0"/>
+          <a:lstStyle/>
+          <a:p>
+            <a:pPr algn="ctr"/>
+          </a:p>
+        </p:txBody>
+      </p:sp>
+      <p:sp>
+        <p:nvSpPr>
+          <p:cNvPr id="12" name="TextBox 11"/>
+          <p:cNvSpPr txBox="1"/>
+          <p:nvPr/>
+        </p:nvSpPr>
+        <p:spPr>
+          <a:xfrm>
+            <a:off x="7479792" y="1764792"/>
+            <a:ext cx="3145536" cy="274320"/>
+          </a:xfrm>
+          <a:prstGeom prst="rect">
+            <a:avLst/>
+          </a:prstGeom>
+          <a:noFill/>
+        </p:spPr>
+        <p:txBody>
+          <a:bodyPr wrap="square" lIns="0" rIns="0" tIns="0" bIns="0" anchor="t">
+            <a:spAutoFit/>
+          </a:bodyPr>
+          <a:lstStyle/>
+          <a:p>
+            <a:pPr algn="l"/>
+            <a:r>
+              <a:rPr sz="1000" b="1" i="0">
+                <a:solidFill>
+                  <a:srgbClr val="FFFFFF"/>
+                </a:solidFill>
+                <a:latin typeface="맑은 고딕"/>
+              </a:rPr>
+              <a:t>다음 마일스톤</a:t>
+            </a:r>
+          </a:p>
+        </p:txBody>
+      </p:sp>
+      <p:sp>
+        <p:nvSpPr>
+          <p:cNvPr id="13" name="Rectangle 12"/>
+          <p:cNvSpPr/>
+          <p:nvPr/>
+        </p:nvSpPr>
+        <p:spPr>
+          <a:xfrm>
+            <a:off x="10698480" y="1691640"/>
+            <a:ext cx="1097280" cy="411480"/>
+          </a:xfrm>
+          <a:prstGeom prst="rect">
+            <a:avLst/>
+          </a:prstGeom>
+          <a:solidFill>
+            <a:srgbClr val="1428A0"/>
+          </a:solidFill>
+          <a:ln>
+            <a:noFill/>
+          </a:ln>
+          <a:effectLst/>
+        </p:spPr>
+        <p:style>
+          <a:lnRef idx="1">
+            <a:schemeClr val="accent1"/>
+          </a:lnRef>
+          <a:fillRef idx="3">
+            <a:schemeClr val="accent1"/>
+          </a:fillRef>
+          <a:effectRef idx="2">
+            <a:schemeClr val="accent1"/>
+          </a:effectRef>
+          <a:fontRef idx="minor">
+            <a:schemeClr val="lt1"/>
+          </a:fontRef>
+        </p:style>
+        <p:txBody>
+          <a:bodyPr rtlCol="0" anchor="ctr" lIns="0" rIns="0" tIns="0" bIns="0"/>
+          <a:lstStyle/>
+          <a:p>
+            <a:pPr algn="ctr"/>
+          </a:p>
+        </p:txBody>
+      </p:sp>
+      <p:sp>
+        <p:nvSpPr>
+          <p:cNvPr id="14" name="TextBox 13"/>
+          <p:cNvSpPr txBox="1"/>
+          <p:nvPr/>
+        </p:nvSpPr>
+        <p:spPr>
+          <a:xfrm>
+            <a:off x="10771632" y="1764792"/>
+            <a:ext cx="950976" cy="274320"/>
+          </a:xfrm>
+          <a:prstGeom prst="rect">
+            <a:avLst/>
+          </a:prstGeom>
+          <a:noFill/>
+        </p:spPr>
+        <p:txBody>
+          <a:bodyPr wrap="square" lIns="0" rIns="0" tIns="0" bIns="0" anchor="t">
+            <a:spAutoFit/>
+          </a:bodyPr>
+          <a:lstStyle/>
+          <a:p>
+            <a:pPr algn="ctr"/>
+            <a:r>
+              <a:rPr sz="1000" b="1" i="0">
+                <a:solidFill>
+                  <a:srgbClr val="FFFFFF"/>
+                </a:solidFill>
+                <a:latin typeface="맑은 고딕"/>
+              </a:rPr>
+              <a:t>신뢰도</a:t>
+            </a:r>
+          </a:p>
+        </p:txBody>
+      </p:sp>
+      <p:sp>
+        <p:nvSpPr>
+          <p:cNvPr id="15" name="Rectangle 14"/>
+          <p:cNvSpPr/>
+          <p:nvPr/>
+        </p:nvSpPr>
+        <p:spPr>
+          <a:xfrm>
+            <a:off x="365760" y="2103120"/>
+            <a:ext cx="640080" cy="393192"/>
+          </a:xfrm>
+          <a:prstGeom prst="rect">
+            <a:avLst/>
+          </a:prstGeom>
+          <a:solidFill>
+            <a:srgbClr val="FEF3C7"/>
+          </a:solidFill>
+          <a:ln>
+            <a:solidFill>
+              <a:srgbClr val="D1D5DB"/>
+            </a:solidFill>
+          </a:ln>
+          <a:effectLst/>
+        </p:spPr>
+        <p:style>
+          <a:lnRef idx="1">
+            <a:schemeClr val="accent1"/>
+          </a:lnRef>
+          <a:fillRef idx="3">
+            <a:schemeClr val="accent1"/>
+          </a:fillRef>
+          <a:effectRef idx="2">
+            <a:schemeClr val="accent1"/>
+          </a:effectRef>
+          <a:fontRef idx="minor">
+            <a:schemeClr val="lt1"/>
+          </a:fontRef>
+        </p:style>
+        <p:txBody>
+          <a:bodyPr rtlCol="0" anchor="ctr" lIns="0" rIns="0" tIns="0" bIns="0"/>
+          <a:lstStyle/>
+          <a:p>
+            <a:pPr algn="ctr"/>
+          </a:p>
+        </p:txBody>
+      </p:sp>
+      <p:sp>
+        <p:nvSpPr>
+          <p:cNvPr id="16" name="Rectangle 15"/>
+          <p:cNvSpPr/>
+          <p:nvPr/>
+        </p:nvSpPr>
+        <p:spPr>
+          <a:xfrm>
+            <a:off x="365760" y="2103120"/>
+            <a:ext cx="54864" cy="393192"/>
+          </a:xfrm>
+          <a:prstGeom prst="rect">
+            <a:avLst/>
+          </a:prstGeom>
+          <a:solidFill>
+            <a:srgbClr val="1428A0"/>
+          </a:solidFill>
+          <a:ln>
+            <a:noFill/>
+          </a:ln>
+          <a:effectLst/>
+        </p:spPr>
+        <p:style>
+          <a:lnRef idx="1">
+            <a:schemeClr val="accent1"/>
+          </a:lnRef>
+          <a:fillRef idx="3">
+            <a:schemeClr val="accent1"/>
+          </a:fillRef>
+          <a:effectRef idx="2">
+            <a:schemeClr val="accent1"/>
+          </a:effectRef>
+          <a:fontRef idx="minor">
+            <a:schemeClr val="lt1"/>
+          </a:fontRef>
+        </p:style>
+        <p:txBody>
+          <a:bodyPr rtlCol="0" anchor="ctr" lIns="0" rIns="0" tIns="0" bIns="0"/>
+          <a:lstStyle/>
+          <a:p>
+            <a:pPr algn="ctr"/>
+          </a:p>
+        </p:txBody>
+      </p:sp>
+      <p:sp>
+        <p:nvSpPr>
+          <p:cNvPr id="17" name="TextBox 16"/>
+          <p:cNvSpPr txBox="1"/>
+          <p:nvPr/>
+        </p:nvSpPr>
+        <p:spPr>
+          <a:xfrm>
+            <a:off x="438912" y="2176272"/>
+            <a:ext cx="530352" cy="274320"/>
+          </a:xfrm>
+          <a:prstGeom prst="rect">
+            <a:avLst/>
+          </a:prstGeom>
+          <a:noFill/>
+        </p:spPr>
+        <p:txBody>
+          <a:bodyPr wrap="square" lIns="0" rIns="0" tIns="0" bIns="0" anchor="t">
+            <a:spAutoFit/>
+          </a:bodyPr>
+          <a:lstStyle/>
+          <a:p>
+            <a:pPr algn="ctr"/>
+            <a:r>
+              <a:rPr sz="950" b="1" i="0">
+                <a:solidFill>
+                  <a:srgbClr val="1428A0"/>
+                </a:solidFill>
+                <a:latin typeface="Calibri"/>
+              </a:rPr>
+              <a:t>MB-4</a:t>
+            </a:r>
+          </a:p>
+        </p:txBody>
+      </p:sp>
+      <p:sp>
+        <p:nvSpPr>
+          <p:cNvPr id="18" name="Rectangle 17"/>
+          <p:cNvSpPr/>
+          <p:nvPr/>
+        </p:nvSpPr>
+        <p:spPr>
+          <a:xfrm>
+            <a:off x="1005840" y="2103120"/>
+            <a:ext cx="2377440" cy="393192"/>
+          </a:xfrm>
+          <a:prstGeom prst="rect">
+            <a:avLst/>
+          </a:prstGeom>
+          <a:solidFill>
+            <a:srgbClr val="FEF3C7"/>
+          </a:solidFill>
+          <a:ln>
+            <a:solidFill>
+              <a:srgbClr val="D1D5DB"/>
+            </a:solidFill>
+          </a:ln>
+          <a:effectLst/>
+        </p:spPr>
+        <p:style>
+          <a:lnRef idx="1">
+            <a:schemeClr val="accent1"/>
+          </a:lnRef>
+          <a:fillRef idx="3">
+            <a:schemeClr val="accent1"/>
+          </a:fillRef>
+          <a:effectRef idx="2">
+            <a:schemeClr val="accent1"/>
+          </a:effectRef>
+          <a:fontRef idx="minor">
+            <a:schemeClr val="lt1"/>
+          </a:fontRef>
+        </p:style>
+        <p:txBody>
+          <a:bodyPr rtlCol="0" anchor="ctr" lIns="0" rIns="0" tIns="0" bIns="0"/>
+          <a:lstStyle/>
+          <a:p>
+            <a:pPr algn="ctr"/>
+          </a:p>
+        </p:txBody>
+      </p:sp>
+      <p:sp>
+        <p:nvSpPr>
+          <p:cNvPr id="19" name="TextBox 18"/>
+          <p:cNvSpPr txBox="1"/>
+          <p:nvPr/>
+        </p:nvSpPr>
+        <p:spPr>
+          <a:xfrm>
+            <a:off x="1078992" y="2194560"/>
+            <a:ext cx="2231136" cy="274320"/>
+          </a:xfrm>
+          <a:prstGeom prst="rect">
+            <a:avLst/>
+          </a:prstGeom>
+          <a:noFill/>
+        </p:spPr>
+        <p:txBody>
+          <a:bodyPr wrap="square" lIns="0" rIns="0" tIns="0" bIns="0" anchor="t">
+            <a:spAutoFit/>
+          </a:bodyPr>
+          <a:lstStyle/>
+          <a:p>
+            <a:pPr algn="l"/>
+            <a:r>
+              <a:rPr sz="900" b="1" i="0">
+                <a:solidFill>
+                  <a:srgbClr val="1A1A1A"/>
+                </a:solidFill>
+                <a:latin typeface="맑은 고딕"/>
+              </a:rPr>
+              <a:t>커스텀 AI 메모리</a:t>
+            </a:r>
+          </a:p>
+        </p:txBody>
+      </p:sp>
+      <p:sp>
+        <p:nvSpPr>
+          <p:cNvPr id="20" name="Rectangle 19"/>
+          <p:cNvSpPr/>
+          <p:nvPr/>
+        </p:nvSpPr>
+        <p:spPr>
+          <a:xfrm>
+            <a:off x="3383280" y="2103120"/>
+            <a:ext cx="4023360" cy="393192"/>
+          </a:xfrm>
+          <a:prstGeom prst="rect">
+            <a:avLst/>
+          </a:prstGeom>
+          <a:solidFill>
+            <a:srgbClr val="FEF3C7"/>
+          </a:solidFill>
+          <a:ln>
+            <a:solidFill>
+              <a:srgbClr val="D1D5DB"/>
+            </a:solidFill>
+          </a:ln>
+          <a:effectLst/>
+        </p:spPr>
+        <p:style>
+          <a:lnRef idx="1">
+            <a:schemeClr val="accent1"/>
+          </a:lnRef>
+          <a:fillRef idx="3">
+            <a:schemeClr val="accent1"/>
+          </a:fillRef>
+          <a:effectRef idx="2">
+            <a:schemeClr val="accent1"/>
+          </a:effectRef>
+          <a:fontRef idx="minor">
+            <a:schemeClr val="lt1"/>
+          </a:fontRef>
+        </p:style>
+        <p:txBody>
+          <a:bodyPr rtlCol="0" anchor="ctr" lIns="0" rIns="0" tIns="0" bIns="0"/>
+          <a:lstStyle/>
+          <a:p>
+            <a:pPr algn="ctr"/>
+          </a:p>
+        </p:txBody>
+      </p:sp>
+      <p:sp>
+        <p:nvSpPr>
+          <p:cNvPr id="21" name="TextBox 20"/>
+          <p:cNvSpPr txBox="1"/>
+          <p:nvPr/>
+        </p:nvSpPr>
+        <p:spPr>
+          <a:xfrm>
+            <a:off x="3474720" y="2194560"/>
+            <a:ext cx="3840480" cy="274320"/>
+          </a:xfrm>
+          <a:prstGeom prst="rect">
+            <a:avLst/>
+          </a:prstGeom>
+          <a:noFill/>
+        </p:spPr>
+        <p:txBody>
+          <a:bodyPr wrap="square" lIns="0" rIns="0" tIns="0" bIns="0" anchor="t">
+            <a:spAutoFit/>
+          </a:bodyPr>
+          <a:lstStyle/>
+          <a:p>
+            <a:pPr algn="l"/>
+            <a:r>
+              <a:rPr sz="850" b="0" i="0">
+                <a:solidFill>
+                  <a:srgbClr val="1A1A1A"/>
+                </a:solidFill>
+                <a:latin typeface="맑은 고딕"/>
+              </a:rPr>
+              <a:t>HBM 회복 (Q3 2025 35%), 베이스다이 커스텀 미가시</a:t>
+            </a:r>
+          </a:p>
+        </p:txBody>
+      </p:sp>
+      <p:sp>
+        <p:nvSpPr>
+          <p:cNvPr id="22" name="Rectangle 21"/>
+          <p:cNvSpPr/>
+          <p:nvPr/>
+        </p:nvSpPr>
+        <p:spPr>
+          <a:xfrm>
+            <a:off x="7406640" y="2103120"/>
+            <a:ext cx="3291840" cy="393192"/>
+          </a:xfrm>
+          <a:prstGeom prst="rect">
+            <a:avLst/>
+          </a:prstGeom>
+          <a:solidFill>
+            <a:srgbClr val="FEF3C7"/>
+          </a:solidFill>
+          <a:ln>
+            <a:solidFill>
+              <a:srgbClr val="D1D5DB"/>
+            </a:solidFill>
+          </a:ln>
+          <a:effectLst/>
+        </p:spPr>
+        <p:style>
+          <a:lnRef idx="1">
+            <a:schemeClr val="accent1"/>
+          </a:lnRef>
+          <a:fillRef idx="3">
+            <a:schemeClr val="accent1"/>
+          </a:fillRef>
+          <a:effectRef idx="2">
+            <a:schemeClr val="accent1"/>
+          </a:effectRef>
+          <a:fontRef idx="minor">
+            <a:schemeClr val="lt1"/>
+          </a:fontRef>
+        </p:style>
+        <p:txBody>
+          <a:bodyPr rtlCol="0" anchor="ctr" lIns="0" rIns="0" tIns="0" bIns="0"/>
+          <a:lstStyle/>
+          <a:p>
+            <a:pPr algn="ctr"/>
+          </a:p>
+        </p:txBody>
+      </p:sp>
+      <p:sp>
+        <p:nvSpPr>
+          <p:cNvPr id="23" name="TextBox 22"/>
+          <p:cNvSpPr txBox="1"/>
+          <p:nvPr/>
+        </p:nvSpPr>
+        <p:spPr>
+          <a:xfrm>
+            <a:off x="7498080" y="2194560"/>
+            <a:ext cx="3108960" cy="274320"/>
+          </a:xfrm>
+          <a:prstGeom prst="rect">
+            <a:avLst/>
+          </a:prstGeom>
+          <a:noFill/>
+        </p:spPr>
+        <p:txBody>
+          <a:bodyPr wrap="square" lIns="0" rIns="0" tIns="0" bIns="0" anchor="t">
+            <a:spAutoFit/>
+          </a:bodyPr>
+          <a:lstStyle/>
+          <a:p>
+            <a:pPr algn="l"/>
+            <a:r>
+              <a:rPr sz="850" b="0" i="0">
+                <a:solidFill>
+                  <a:srgbClr val="1A1A1A"/>
+                </a:solidFill>
+                <a:latin typeface="맑은 고딕"/>
+              </a:rPr>
+              <a:t>2026 Tech Day SCADA + Pangea v3</a:t>
+            </a:r>
+          </a:p>
+        </p:txBody>
+      </p:sp>
+      <p:sp>
+        <p:nvSpPr>
+          <p:cNvPr id="24" name="Rectangle 23"/>
+          <p:cNvSpPr/>
+          <p:nvPr/>
+        </p:nvSpPr>
+        <p:spPr>
+          <a:xfrm>
+            <a:off x="10698480" y="2103120"/>
+            <a:ext cx="1097280" cy="393192"/>
+          </a:xfrm>
+          <a:prstGeom prst="rect">
+            <a:avLst/>
+          </a:prstGeom>
+          <a:solidFill>
+            <a:srgbClr val="FEF3C7"/>
+          </a:solidFill>
+          <a:ln>
+            <a:solidFill>
+              <a:srgbClr val="D1D5DB"/>
+            </a:solidFill>
+          </a:ln>
+          <a:effectLst/>
+        </p:spPr>
+        <p:style>
+          <a:lnRef idx="1">
+            <a:schemeClr val="accent1"/>
+          </a:lnRef>
+          <a:fillRef idx="3">
+            <a:schemeClr val="accent1"/>
+          </a:fillRef>
+          <a:effectRef idx="2">
+            <a:schemeClr val="accent1"/>
+          </a:effectRef>
+          <a:fontRef idx="minor">
+            <a:schemeClr val="lt1"/>
+          </a:fontRef>
+        </p:style>
+        <p:txBody>
+          <a:bodyPr rtlCol="0" anchor="ctr" lIns="0" rIns="0" tIns="0" bIns="0"/>
+          <a:lstStyle/>
+          <a:p>
+            <a:pPr algn="ctr"/>
+          </a:p>
+        </p:txBody>
+      </p:sp>
+      <p:sp>
+        <p:nvSpPr>
+          <p:cNvPr id="25" name="TextBox 24"/>
+          <p:cNvSpPr txBox="1"/>
+          <p:nvPr/>
+        </p:nvSpPr>
+        <p:spPr>
+          <a:xfrm>
+            <a:off x="10698480" y="2194560"/>
+            <a:ext cx="1097280" cy="274320"/>
+          </a:xfrm>
+          <a:prstGeom prst="rect">
+            <a:avLst/>
+          </a:prstGeom>
+          <a:noFill/>
+        </p:spPr>
+        <p:txBody>
+          <a:bodyPr wrap="square" lIns="0" rIns="0" tIns="0" bIns="0" anchor="t">
+            <a:spAutoFit/>
+          </a:bodyPr>
+          <a:lstStyle/>
+          <a:p>
+            <a:pPr algn="ctr"/>
+            <a:r>
+              <a:rPr sz="1000" b="1" i="0">
+                <a:solidFill>
+                  <a:srgbClr val="1428A0"/>
+                </a:solidFill>
+                <a:latin typeface="Calibri"/>
+              </a:rPr>
+              <a:t>🔵</a:t>
+            </a:r>
+          </a:p>
+        </p:txBody>
+      </p:sp>
+      <p:sp>
+        <p:nvSpPr>
+          <p:cNvPr id="26" name="Rectangle 25"/>
+          <p:cNvSpPr/>
+          <p:nvPr/>
+        </p:nvSpPr>
+        <p:spPr>
+          <a:xfrm>
+            <a:off x="365760" y="2496312"/>
+            <a:ext cx="640080" cy="393192"/>
+          </a:xfrm>
+          <a:prstGeom prst="rect">
+            <a:avLst/>
+          </a:prstGeom>
+          <a:solidFill>
+            <a:srgbClr val="FEF3C7"/>
+          </a:solidFill>
+          <a:ln>
+            <a:solidFill>
+              <a:srgbClr val="D1D5DB"/>
+            </a:solidFill>
+          </a:ln>
+          <a:effectLst/>
+        </p:spPr>
+        <p:style>
+          <a:lnRef idx="1">
+            <a:schemeClr val="accent1"/>
+          </a:lnRef>
+          <a:fillRef idx="3">
+            <a:schemeClr val="accent1"/>
+          </a:fillRef>
+          <a:effectRef idx="2">
+            <a:schemeClr val="accent1"/>
+          </a:effectRef>
+          <a:fontRef idx="minor">
+            <a:schemeClr val="lt1"/>
+          </a:fontRef>
+        </p:style>
+        <p:txBody>
+          <a:bodyPr rtlCol="0" anchor="ctr" lIns="0" rIns="0" tIns="0" bIns="0"/>
+          <a:lstStyle/>
+          <a:p>
+            <a:pPr algn="ctr"/>
+          </a:p>
+        </p:txBody>
+      </p:sp>
+      <p:sp>
+        <p:nvSpPr>
+          <p:cNvPr id="27" name="Rectangle 26"/>
+          <p:cNvSpPr/>
+          <p:nvPr/>
+        </p:nvSpPr>
+        <p:spPr>
+          <a:xfrm>
+            <a:off x="365760" y="2496312"/>
+            <a:ext cx="54864" cy="393192"/>
+          </a:xfrm>
+          <a:prstGeom prst="rect">
+            <a:avLst/>
+          </a:prstGeom>
+          <a:solidFill>
+            <a:srgbClr val="1428A0"/>
+          </a:solidFill>
+          <a:ln>
+            <a:noFill/>
+          </a:ln>
+          <a:effectLst/>
+        </p:spPr>
+        <p:style>
+          <a:lnRef idx="1">
+            <a:schemeClr val="accent1"/>
+          </a:lnRef>
+          <a:fillRef idx="3">
+            <a:schemeClr val="accent1"/>
+          </a:fillRef>
+          <a:effectRef idx="2">
+            <a:schemeClr val="accent1"/>
+          </a:effectRef>
+          <a:fontRef idx="minor">
+            <a:schemeClr val="lt1"/>
+          </a:fontRef>
+        </p:style>
+        <p:txBody>
+          <a:bodyPr rtlCol="0" anchor="ctr" lIns="0" rIns="0" tIns="0" bIns="0"/>
+          <a:lstStyle/>
+          <a:p>
+            <a:pPr algn="ctr"/>
+          </a:p>
+        </p:txBody>
+      </p:sp>
+      <p:sp>
+        <p:nvSpPr>
+          <p:cNvPr id="28" name="TextBox 27"/>
+          <p:cNvSpPr txBox="1"/>
+          <p:nvPr/>
+        </p:nvSpPr>
+        <p:spPr>
+          <a:xfrm>
+            <a:off x="438912" y="2569464"/>
+            <a:ext cx="530352" cy="274320"/>
+          </a:xfrm>
+          <a:prstGeom prst="rect">
+            <a:avLst/>
+          </a:prstGeom>
+          <a:noFill/>
+        </p:spPr>
+        <p:txBody>
+          <a:bodyPr wrap="square" lIns="0" rIns="0" tIns="0" bIns="0" anchor="t">
+            <a:spAutoFit/>
+          </a:bodyPr>
+          <a:lstStyle/>
+          <a:p>
+            <a:pPr algn="ctr"/>
+            <a:r>
+              <a:rPr sz="950" b="1" i="0">
+                <a:solidFill>
+                  <a:srgbClr val="1428A0"/>
+                </a:solidFill>
+                <a:latin typeface="Calibri"/>
+              </a:rPr>
+              <a:t>RS-3</a:t>
+            </a:r>
+          </a:p>
+        </p:txBody>
+      </p:sp>
+      <p:sp>
+        <p:nvSpPr>
+          <p:cNvPr id="29" name="Rectangle 28"/>
+          <p:cNvSpPr/>
+          <p:nvPr/>
+        </p:nvSpPr>
+        <p:spPr>
+          <a:xfrm>
+            <a:off x="1005840" y="2496312"/>
+            <a:ext cx="2377440" cy="393192"/>
+          </a:xfrm>
+          <a:prstGeom prst="rect">
+            <a:avLst/>
+          </a:prstGeom>
+          <a:solidFill>
+            <a:srgbClr val="FEF3C7"/>
+          </a:solidFill>
+          <a:ln>
+            <a:solidFill>
+              <a:srgbClr val="D1D5DB"/>
+            </a:solidFill>
+          </a:ln>
+          <a:effectLst/>
+        </p:spPr>
+        <p:style>
+          <a:lnRef idx="1">
+            <a:schemeClr val="accent1"/>
+          </a:lnRef>
+          <a:fillRef idx="3">
+            <a:schemeClr val="accent1"/>
+          </a:fillRef>
+          <a:effectRef idx="2">
+            <a:schemeClr val="accent1"/>
+          </a:effectRef>
+          <a:fontRef idx="minor">
+            <a:schemeClr val="lt1"/>
+          </a:fontRef>
+        </p:style>
+        <p:txBody>
+          <a:bodyPr rtlCol="0" anchor="ctr" lIns="0" rIns="0" tIns="0" bIns="0"/>
+          <a:lstStyle/>
+          <a:p>
+            <a:pPr algn="ctr"/>
+          </a:p>
+        </p:txBody>
+      </p:sp>
+      <p:sp>
+        <p:nvSpPr>
+          <p:cNvPr id="30" name="TextBox 29"/>
+          <p:cNvSpPr txBox="1"/>
+          <p:nvPr/>
+        </p:nvSpPr>
+        <p:spPr>
+          <a:xfrm>
+            <a:off x="1078992" y="2587752"/>
+            <a:ext cx="2231136" cy="274320"/>
+          </a:xfrm>
+          <a:prstGeom prst="rect">
+            <a:avLst/>
+          </a:prstGeom>
+          <a:noFill/>
+        </p:spPr>
+        <p:txBody>
+          <a:bodyPr wrap="square" lIns="0" rIns="0" tIns="0" bIns="0" anchor="t">
+            <a:spAutoFit/>
+          </a:bodyPr>
+          <a:lstStyle/>
+          <a:p>
+            <a:pPr algn="l"/>
+            <a:r>
+              <a:rPr sz="900" b="1" i="0">
+                <a:solidFill>
+                  <a:srgbClr val="1A1A1A"/>
+                </a:solidFill>
+                <a:latin typeface="맑은 고딕"/>
+              </a:rPr>
+              <a:t>고객특화·전환비용 (NVIDIA 통합)</a:t>
+            </a:r>
+          </a:p>
+        </p:txBody>
+      </p:sp>
+      <p:sp>
+        <p:nvSpPr>
+          <p:cNvPr id="31" name="Rectangle 30"/>
+          <p:cNvSpPr/>
+          <p:nvPr/>
+        </p:nvSpPr>
+        <p:spPr>
+          <a:xfrm>
+            <a:off x="3383280" y="2496312"/>
+            <a:ext cx="4023360" cy="393192"/>
+          </a:xfrm>
+          <a:prstGeom prst="rect">
+            <a:avLst/>
+          </a:prstGeom>
+          <a:solidFill>
+            <a:srgbClr val="FEF3C7"/>
+          </a:solidFill>
+          <a:ln>
+            <a:solidFill>
+              <a:srgbClr val="D1D5DB"/>
+            </a:solidFill>
+          </a:ln>
+          <a:effectLst/>
+        </p:spPr>
+        <p:style>
+          <a:lnRef idx="1">
+            <a:schemeClr val="accent1"/>
+          </a:lnRef>
+          <a:fillRef idx="3">
+            <a:schemeClr val="accent1"/>
+          </a:fillRef>
+          <a:effectRef idx="2">
+            <a:schemeClr val="accent1"/>
+          </a:effectRef>
+          <a:fontRef idx="minor">
+            <a:schemeClr val="lt1"/>
+          </a:fontRef>
+        </p:style>
+        <p:txBody>
+          <a:bodyPr rtlCol="0" anchor="ctr" lIns="0" rIns="0" tIns="0" bIns="0"/>
+          <a:lstStyle/>
+          <a:p>
+            <a:pPr algn="ctr"/>
+          </a:p>
+        </p:txBody>
+      </p:sp>
+      <p:sp>
+        <p:nvSpPr>
+          <p:cNvPr id="32" name="TextBox 31"/>
+          <p:cNvSpPr txBox="1"/>
+          <p:nvPr/>
+        </p:nvSpPr>
+        <p:spPr>
+          <a:xfrm>
+            <a:off x="3474720" y="2587752"/>
+            <a:ext cx="3840480" cy="274320"/>
+          </a:xfrm>
+          <a:prstGeom prst="rect">
+            <a:avLst/>
+          </a:prstGeom>
+          <a:noFill/>
+        </p:spPr>
+        <p:txBody>
+          <a:bodyPr wrap="square" lIns="0" rIns="0" tIns="0" bIns="0" anchor="t">
+            <a:spAutoFit/>
+          </a:bodyPr>
+          <a:lstStyle/>
+          <a:p>
+            <a:pPr algn="l"/>
+            <a:r>
+              <a:rPr sz="850" b="0" i="0">
+                <a:solidFill>
+                  <a:srgbClr val="1A1A1A"/>
+                </a:solidFill>
+                <a:latin typeface="맑은 고딕"/>
+              </a:rPr>
+              <a:t>CMX 진입 (PM1753), SCADA 공개 로드맵 부재</a:t>
+            </a:r>
+          </a:p>
+        </p:txBody>
+      </p:sp>
+      <p:sp>
+        <p:nvSpPr>
+          <p:cNvPr id="33" name="Rectangle 32"/>
+          <p:cNvSpPr/>
+          <p:nvPr/>
+        </p:nvSpPr>
+        <p:spPr>
+          <a:xfrm>
+            <a:off x="7406640" y="2496312"/>
+            <a:ext cx="3291840" cy="393192"/>
+          </a:xfrm>
+          <a:prstGeom prst="rect">
+            <a:avLst/>
+          </a:prstGeom>
+          <a:solidFill>
+            <a:srgbClr val="FEF3C7"/>
+          </a:solidFill>
+          <a:ln>
+            <a:solidFill>
+              <a:srgbClr val="D1D5DB"/>
+            </a:solidFill>
+          </a:ln>
+          <a:effectLst/>
+        </p:spPr>
+        <p:style>
+          <a:lnRef idx="1">
+            <a:schemeClr val="accent1"/>
+          </a:lnRef>
+          <a:fillRef idx="3">
+            <a:schemeClr val="accent1"/>
+          </a:fillRef>
+          <a:effectRef idx="2">
+            <a:schemeClr val="accent1"/>
+          </a:effectRef>
+          <a:fontRef idx="minor">
+            <a:schemeClr val="lt1"/>
+          </a:fontRef>
+        </p:style>
+        <p:txBody>
+          <a:bodyPr rtlCol="0" anchor="ctr" lIns="0" rIns="0" tIns="0" bIns="0"/>
+          <a:lstStyle/>
+          <a:p>
+            <a:pPr algn="ctr"/>
+          </a:p>
+        </p:txBody>
+      </p:sp>
+      <p:sp>
+        <p:nvSpPr>
+          <p:cNvPr id="34" name="TextBox 33"/>
+          <p:cNvSpPr txBox="1"/>
+          <p:nvPr/>
+        </p:nvSpPr>
+        <p:spPr>
+          <a:xfrm>
+            <a:off x="7498080" y="2587752"/>
+            <a:ext cx="3108960" cy="274320"/>
+          </a:xfrm>
+          <a:prstGeom prst="rect">
+            <a:avLst/>
+          </a:prstGeom>
+          <a:noFill/>
+        </p:spPr>
+        <p:txBody>
+          <a:bodyPr wrap="square" lIns="0" rIns="0" tIns="0" bIns="0" anchor="t">
+            <a:spAutoFit/>
+          </a:bodyPr>
+          <a:lstStyle/>
+          <a:p>
+            <a:pPr algn="l"/>
+            <a:r>
+              <a:rPr sz="850" b="0" i="0">
+                <a:solidFill>
+                  <a:srgbClr val="1A1A1A"/>
+                </a:solidFill>
+                <a:latin typeface="맑은 고딕"/>
+              </a:rPr>
+              <a:t>2026 SCADA AI SSD 로드맵 발표</a:t>
+            </a:r>
+          </a:p>
+        </p:txBody>
+      </p:sp>
+      <p:sp>
+        <p:nvSpPr>
+          <p:cNvPr id="35" name="Rectangle 34"/>
+          <p:cNvSpPr/>
+          <p:nvPr/>
+        </p:nvSpPr>
+        <p:spPr>
+          <a:xfrm>
+            <a:off x="10698480" y="2496312"/>
+            <a:ext cx="1097280" cy="393192"/>
+          </a:xfrm>
+          <a:prstGeom prst="rect">
+            <a:avLst/>
+          </a:prstGeom>
+          <a:solidFill>
+            <a:srgbClr val="FEF3C7"/>
+          </a:solidFill>
+          <a:ln>
+            <a:solidFill>
+              <a:srgbClr val="D1D5DB"/>
+            </a:solidFill>
+          </a:ln>
+          <a:effectLst/>
+        </p:spPr>
+        <p:style>
+          <a:lnRef idx="1">
+            <a:schemeClr val="accent1"/>
+          </a:lnRef>
+          <a:fillRef idx="3">
+            <a:schemeClr val="accent1"/>
+          </a:fillRef>
+          <a:effectRef idx="2">
+            <a:schemeClr val="accent1"/>
+          </a:effectRef>
+          <a:fontRef idx="minor">
+            <a:schemeClr val="lt1"/>
+          </a:fontRef>
+        </p:style>
+        <p:txBody>
+          <a:bodyPr rtlCol="0" anchor="ctr" lIns="0" rIns="0" tIns="0" bIns="0"/>
+          <a:lstStyle/>
+          <a:p>
+            <a:pPr algn="ctr"/>
+          </a:p>
+        </p:txBody>
+      </p:sp>
+      <p:sp>
+        <p:nvSpPr>
+          <p:cNvPr id="36" name="TextBox 35"/>
+          <p:cNvSpPr txBox="1"/>
+          <p:nvPr/>
+        </p:nvSpPr>
+        <p:spPr>
+          <a:xfrm>
+            <a:off x="10698480" y="2587752"/>
+            <a:ext cx="1097280" cy="274320"/>
+          </a:xfrm>
+          <a:prstGeom prst="rect">
+            <a:avLst/>
+          </a:prstGeom>
+          <a:noFill/>
+        </p:spPr>
+        <p:txBody>
+          <a:bodyPr wrap="square" lIns="0" rIns="0" tIns="0" bIns="0" anchor="t">
+            <a:spAutoFit/>
+          </a:bodyPr>
+          <a:lstStyle/>
+          <a:p>
+            <a:pPr algn="ctr"/>
+            <a:r>
+              <a:rPr sz="1000" b="1" i="0">
+                <a:solidFill>
+                  <a:srgbClr val="1428A0"/>
+                </a:solidFill>
+                <a:latin typeface="Calibri"/>
+              </a:rPr>
+              <a:t>✅ / ⚠️</a:t>
+            </a:r>
+          </a:p>
+        </p:txBody>
+      </p:sp>
+      <p:sp>
+        <p:nvSpPr>
+          <p:cNvPr id="37" name="Rectangle 36"/>
+          <p:cNvSpPr/>
+          <p:nvPr/>
+        </p:nvSpPr>
+        <p:spPr>
+          <a:xfrm>
+            <a:off x="365760" y="2889504"/>
+            <a:ext cx="640080" cy="393192"/>
+          </a:xfrm>
+          <a:prstGeom prst="rect">
+            <a:avLst/>
+          </a:prstGeom>
+          <a:solidFill>
+            <a:srgbClr val="FEF3C7"/>
+          </a:solidFill>
+          <a:ln>
+            <a:solidFill>
+              <a:srgbClr val="D1D5DB"/>
+            </a:solidFill>
+          </a:ln>
+          <a:effectLst/>
+        </p:spPr>
+        <p:style>
+          <a:lnRef idx="1">
+            <a:schemeClr val="accent1"/>
+          </a:lnRef>
+          <a:fillRef idx="3">
+            <a:schemeClr val="accent1"/>
+          </a:fillRef>
+          <a:effectRef idx="2">
+            <a:schemeClr val="accent1"/>
+          </a:effectRef>
+          <a:fontRef idx="minor">
+            <a:schemeClr val="lt1"/>
+          </a:fontRef>
+        </p:style>
+        <p:txBody>
+          <a:bodyPr rtlCol="0" anchor="ctr" lIns="0" rIns="0" tIns="0" bIns="0"/>
+          <a:lstStyle/>
+          <a:p>
+            <a:pPr algn="ctr"/>
+          </a:p>
+        </p:txBody>
+      </p:sp>
+      <p:sp>
+        <p:nvSpPr>
+          <p:cNvPr id="38" name="Rectangle 37"/>
+          <p:cNvSpPr/>
+          <p:nvPr/>
+        </p:nvSpPr>
+        <p:spPr>
+          <a:xfrm>
+            <a:off x="365760" y="2889504"/>
+            <a:ext cx="54864" cy="393192"/>
+          </a:xfrm>
+          <a:prstGeom prst="rect">
+            <a:avLst/>
+          </a:prstGeom>
+          <a:solidFill>
+            <a:srgbClr val="1428A0"/>
+          </a:solidFill>
+          <a:ln>
+            <a:noFill/>
+          </a:ln>
+          <a:effectLst/>
+        </p:spPr>
+        <p:style>
+          <a:lnRef idx="1">
+            <a:schemeClr val="accent1"/>
+          </a:lnRef>
+          <a:fillRef idx="3">
+            <a:schemeClr val="accent1"/>
+          </a:fillRef>
+          <a:effectRef idx="2">
+            <a:schemeClr val="accent1"/>
+          </a:effectRef>
+          <a:fontRef idx="minor">
+            <a:schemeClr val="lt1"/>
+          </a:fontRef>
+        </p:style>
+        <p:txBody>
+          <a:bodyPr rtlCol="0" anchor="ctr" lIns="0" rIns="0" tIns="0" bIns="0"/>
+          <a:lstStyle/>
+          <a:p>
+            <a:pPr algn="ctr"/>
+          </a:p>
+        </p:txBody>
+      </p:sp>
+      <p:sp>
+        <p:nvSpPr>
+          <p:cNvPr id="39" name="TextBox 38"/>
+          <p:cNvSpPr txBox="1"/>
+          <p:nvPr/>
+        </p:nvSpPr>
+        <p:spPr>
+          <a:xfrm>
+            <a:off x="438912" y="2962656"/>
+            <a:ext cx="530352" cy="274320"/>
+          </a:xfrm>
+          <a:prstGeom prst="rect">
+            <a:avLst/>
+          </a:prstGeom>
+          <a:noFill/>
+        </p:spPr>
+        <p:txBody>
+          <a:bodyPr wrap="square" lIns="0" rIns="0" tIns="0" bIns="0" anchor="t">
+            <a:spAutoFit/>
+          </a:bodyPr>
+          <a:lstStyle/>
+          <a:p>
+            <a:pPr algn="ctr"/>
+            <a:r>
+              <a:rPr sz="950" b="1" i="0">
+                <a:solidFill>
+                  <a:srgbClr val="1428A0"/>
+                </a:solidFill>
+                <a:latin typeface="Calibri"/>
+              </a:rPr>
+              <a:t>RS-6</a:t>
+            </a:r>
+          </a:p>
+        </p:txBody>
+      </p:sp>
+      <p:sp>
+        <p:nvSpPr>
+          <p:cNvPr id="40" name="Rectangle 39"/>
+          <p:cNvSpPr/>
+          <p:nvPr/>
+        </p:nvSpPr>
+        <p:spPr>
+          <a:xfrm>
+            <a:off x="1005840" y="2889504"/>
+            <a:ext cx="2377440" cy="393192"/>
+          </a:xfrm>
+          <a:prstGeom prst="rect">
+            <a:avLst/>
+          </a:prstGeom>
+          <a:solidFill>
+            <a:srgbClr val="FEF3C7"/>
+          </a:solidFill>
+          <a:ln>
+            <a:solidFill>
+              <a:srgbClr val="D1D5DB"/>
+            </a:solidFill>
+          </a:ln>
+          <a:effectLst/>
+        </p:spPr>
+        <p:style>
+          <a:lnRef idx="1">
+            <a:schemeClr val="accent1"/>
+          </a:lnRef>
+          <a:fillRef idx="3">
+            <a:schemeClr val="accent1"/>
+          </a:fillRef>
+          <a:effectRef idx="2">
+            <a:schemeClr val="accent1"/>
+          </a:effectRef>
+          <a:fontRef idx="minor">
+            <a:schemeClr val="lt1"/>
+          </a:fontRef>
+        </p:style>
+        <p:txBody>
+          <a:bodyPr rtlCol="0" anchor="ctr" lIns="0" rIns="0" tIns="0" bIns="0"/>
+          <a:lstStyle/>
+          <a:p>
+            <a:pPr algn="ctr"/>
+          </a:p>
+        </p:txBody>
+      </p:sp>
+      <p:sp>
+        <p:nvSpPr>
+          <p:cNvPr id="41" name="TextBox 40"/>
+          <p:cNvSpPr txBox="1"/>
+          <p:nvPr/>
+        </p:nvSpPr>
+        <p:spPr>
+          <a:xfrm>
+            <a:off x="1078992" y="2980944"/>
+            <a:ext cx="2231136" cy="274320"/>
+          </a:xfrm>
+          <a:prstGeom prst="rect">
+            <a:avLst/>
+          </a:prstGeom>
+          <a:noFill/>
+        </p:spPr>
+        <p:txBody>
+          <a:bodyPr wrap="square" lIns="0" rIns="0" tIns="0" bIns="0" anchor="t">
+            <a:spAutoFit/>
+          </a:bodyPr>
+          <a:lstStyle/>
+          <a:p>
+            <a:pPr algn="l"/>
+            <a:r>
+              <a:rPr sz="900" b="1" i="0">
+                <a:solidFill>
+                  <a:srgbClr val="1A1A1A"/>
+                </a:solidFill>
+                <a:latin typeface="맑은 고딕"/>
+              </a:rPr>
+              <a:t>공정 리더십 통합</a:t>
+            </a:r>
+          </a:p>
+        </p:txBody>
+      </p:sp>
+      <p:sp>
+        <p:nvSpPr>
+          <p:cNvPr id="42" name="Rectangle 41"/>
+          <p:cNvSpPr/>
+          <p:nvPr/>
+        </p:nvSpPr>
+        <p:spPr>
+          <a:xfrm>
+            <a:off x="3383280" y="2889504"/>
+            <a:ext cx="4023360" cy="393192"/>
+          </a:xfrm>
+          <a:prstGeom prst="rect">
+            <a:avLst/>
+          </a:prstGeom>
+          <a:solidFill>
+            <a:srgbClr val="FEF3C7"/>
+          </a:solidFill>
+          <a:ln>
+            <a:solidFill>
+              <a:srgbClr val="D1D5DB"/>
+            </a:solidFill>
+          </a:ln>
+          <a:effectLst/>
+        </p:spPr>
+        <p:style>
+          <a:lnRef idx="1">
+            <a:schemeClr val="accent1"/>
+          </a:lnRef>
+          <a:fillRef idx="3">
+            <a:schemeClr val="accent1"/>
+          </a:fillRef>
+          <a:effectRef idx="2">
+            <a:schemeClr val="accent1"/>
+          </a:effectRef>
+          <a:fontRef idx="minor">
+            <a:schemeClr val="lt1"/>
+          </a:fontRef>
+        </p:style>
+        <p:txBody>
+          <a:bodyPr rtlCol="0" anchor="ctr" lIns="0" rIns="0" tIns="0" bIns="0"/>
+          <a:lstStyle/>
+          <a:p>
+            <a:pPr algn="ctr"/>
+          </a:p>
+        </p:txBody>
+      </p:sp>
+      <p:sp>
+        <p:nvSpPr>
+          <p:cNvPr id="43" name="TextBox 42"/>
+          <p:cNvSpPr txBox="1"/>
+          <p:nvPr/>
+        </p:nvSpPr>
+        <p:spPr>
+          <a:xfrm>
+            <a:off x="3474720" y="2980944"/>
+            <a:ext cx="3840480" cy="274320"/>
+          </a:xfrm>
+          <a:prstGeom prst="rect">
+            <a:avLst/>
+          </a:prstGeom>
+          <a:noFill/>
+        </p:spPr>
+        <p:txBody>
+          <a:bodyPr wrap="square" lIns="0" rIns="0" tIns="0" bIns="0" anchor="t">
+            <a:spAutoFit/>
+          </a:bodyPr>
+          <a:lstStyle/>
+          <a:p>
+            <a:pPr algn="l"/>
+            <a:r>
+              <a:rPr sz="850" b="0" i="0">
+                <a:solidFill>
+                  <a:srgbClr val="1A1A1A"/>
+                </a:solidFill>
+                <a:latin typeface="맑은 고딕"/>
+              </a:rPr>
+              <a:t>1c yield 60%, hybrid bonding IP 공백 (YMTC 의존 정황)</a:t>
+            </a:r>
+          </a:p>
+        </p:txBody>
+      </p:sp>
+      <p:sp>
+        <p:nvSpPr>
+          <p:cNvPr id="44" name="Rectangle 43"/>
+          <p:cNvSpPr/>
+          <p:nvPr/>
+        </p:nvSpPr>
+        <p:spPr>
+          <a:xfrm>
+            <a:off x="7406640" y="2889504"/>
+            <a:ext cx="3291840" cy="393192"/>
+          </a:xfrm>
+          <a:prstGeom prst="rect">
+            <a:avLst/>
+          </a:prstGeom>
+          <a:solidFill>
+            <a:srgbClr val="FEF3C7"/>
+          </a:solidFill>
+          <a:ln>
+            <a:solidFill>
+              <a:srgbClr val="D1D5DB"/>
+            </a:solidFill>
+          </a:ln>
+          <a:effectLst/>
+        </p:spPr>
+        <p:style>
+          <a:lnRef idx="1">
+            <a:schemeClr val="accent1"/>
+          </a:lnRef>
+          <a:fillRef idx="3">
+            <a:schemeClr val="accent1"/>
+          </a:fillRef>
+          <a:effectRef idx="2">
+            <a:schemeClr val="accent1"/>
+          </a:effectRef>
+          <a:fontRef idx="minor">
+            <a:schemeClr val="lt1"/>
+          </a:fontRef>
+        </p:style>
+        <p:txBody>
+          <a:bodyPr rtlCol="0" anchor="ctr" lIns="0" rIns="0" tIns="0" bIns="0"/>
+          <a:lstStyle/>
+          <a:p>
+            <a:pPr algn="ctr"/>
+          </a:p>
+        </p:txBody>
+      </p:sp>
+      <p:sp>
+        <p:nvSpPr>
+          <p:cNvPr id="45" name="TextBox 44"/>
+          <p:cNvSpPr txBox="1"/>
+          <p:nvPr/>
+        </p:nvSpPr>
+        <p:spPr>
+          <a:xfrm>
+            <a:off x="7498080" y="2980944"/>
+            <a:ext cx="3108960" cy="274320"/>
+          </a:xfrm>
+          <a:prstGeom prst="rect">
+            <a:avLst/>
+          </a:prstGeom>
+          <a:noFill/>
+        </p:spPr>
+        <p:txBody>
+          <a:bodyPr wrap="square" lIns="0" rIns="0" tIns="0" bIns="0" anchor="t">
+            <a:spAutoFit/>
+          </a:bodyPr>
+          <a:lstStyle/>
+          <a:p>
+            <a:pPr algn="l"/>
+            <a:r>
+              <a:rPr sz="850" b="0" i="0">
+                <a:solidFill>
+                  <a:srgbClr val="1A1A1A"/>
+                </a:solidFill>
+                <a:latin typeface="맑은 고딕"/>
+              </a:rPr>
+              <a:t>2026 H2 V10 BV NAND 양산 + 80% yield</a:t>
+            </a:r>
+          </a:p>
+        </p:txBody>
+      </p:sp>
+      <p:sp>
+        <p:nvSpPr>
+          <p:cNvPr id="46" name="Rectangle 45"/>
+          <p:cNvSpPr/>
+          <p:nvPr/>
+        </p:nvSpPr>
+        <p:spPr>
+          <a:xfrm>
+            <a:off x="10698480" y="2889504"/>
+            <a:ext cx="1097280" cy="393192"/>
+          </a:xfrm>
+          <a:prstGeom prst="rect">
+            <a:avLst/>
+          </a:prstGeom>
+          <a:solidFill>
+            <a:srgbClr val="FEF3C7"/>
+          </a:solidFill>
+          <a:ln>
+            <a:solidFill>
+              <a:srgbClr val="D1D5DB"/>
+            </a:solidFill>
+          </a:ln>
+          <a:effectLst/>
+        </p:spPr>
+        <p:style>
+          <a:lnRef idx="1">
+            <a:schemeClr val="accent1"/>
+          </a:lnRef>
+          <a:fillRef idx="3">
+            <a:schemeClr val="accent1"/>
+          </a:fillRef>
+          <a:effectRef idx="2">
+            <a:schemeClr val="accent1"/>
+          </a:effectRef>
+          <a:fontRef idx="minor">
+            <a:schemeClr val="lt1"/>
+          </a:fontRef>
+        </p:style>
+        <p:txBody>
+          <a:bodyPr rtlCol="0" anchor="ctr" lIns="0" rIns="0" tIns="0" bIns="0"/>
+          <a:lstStyle/>
+          <a:p>
+            <a:pPr algn="ctr"/>
+          </a:p>
+        </p:txBody>
+      </p:sp>
+      <p:sp>
+        <p:nvSpPr>
+          <p:cNvPr id="47" name="TextBox 46"/>
+          <p:cNvSpPr txBox="1"/>
+          <p:nvPr/>
+        </p:nvSpPr>
+        <p:spPr>
+          <a:xfrm>
+            <a:off x="10698480" y="2980944"/>
+            <a:ext cx="1097280" cy="274320"/>
+          </a:xfrm>
+          <a:prstGeom prst="rect">
+            <a:avLst/>
+          </a:prstGeom>
+          <a:noFill/>
+        </p:spPr>
+        <p:txBody>
+          <a:bodyPr wrap="square" lIns="0" rIns="0" tIns="0" bIns="0" anchor="t">
+            <a:spAutoFit/>
+          </a:bodyPr>
+          <a:lstStyle/>
+          <a:p>
+            <a:pPr algn="ctr"/>
+            <a:r>
+              <a:rPr sz="1000" b="1" i="0">
+                <a:solidFill>
+                  <a:srgbClr val="1428A0"/>
+                </a:solidFill>
+                <a:latin typeface="Calibri"/>
+              </a:rPr>
+              <a:t>🔵 / ⚠️</a:t>
+            </a:r>
+          </a:p>
+        </p:txBody>
+      </p:sp>
+      <p:sp>
+        <p:nvSpPr>
+          <p:cNvPr id="48" name="Rectangle 47"/>
+          <p:cNvSpPr/>
+          <p:nvPr/>
+        </p:nvSpPr>
+        <p:spPr>
+          <a:xfrm>
+            <a:off x="365760" y="3282696"/>
+            <a:ext cx="640080" cy="393192"/>
+          </a:xfrm>
+          <a:prstGeom prst="rect">
+            <a:avLst/>
+          </a:prstGeom>
+          <a:solidFill>
+            <a:srgbClr val="FEF3C7"/>
+          </a:solidFill>
+          <a:ln>
+            <a:solidFill>
+              <a:srgbClr val="D1D5DB"/>
+            </a:solidFill>
+          </a:ln>
+          <a:effectLst/>
+        </p:spPr>
+        <p:style>
+          <a:lnRef idx="1">
+            <a:schemeClr val="accent1"/>
+          </a:lnRef>
+          <a:fillRef idx="3">
+            <a:schemeClr val="accent1"/>
+          </a:fillRef>
+          <a:effectRef idx="2">
+            <a:schemeClr val="accent1"/>
+          </a:effectRef>
+          <a:fontRef idx="minor">
+            <a:schemeClr val="lt1"/>
+          </a:fontRef>
+        </p:style>
+        <p:txBody>
+          <a:bodyPr rtlCol="0" anchor="ctr" lIns="0" rIns="0" tIns="0" bIns="0"/>
+          <a:lstStyle/>
+          <a:p>
+            <a:pPr algn="ctr"/>
+          </a:p>
+        </p:txBody>
+      </p:sp>
+      <p:sp>
+        <p:nvSpPr>
+          <p:cNvPr id="49" name="Rectangle 48"/>
+          <p:cNvSpPr/>
+          <p:nvPr/>
+        </p:nvSpPr>
+        <p:spPr>
+          <a:xfrm>
+            <a:off x="365760" y="3282696"/>
+            <a:ext cx="54864" cy="393192"/>
+          </a:xfrm>
+          <a:prstGeom prst="rect">
+            <a:avLst/>
+          </a:prstGeom>
+          <a:solidFill>
+            <a:srgbClr val="1428A0"/>
+          </a:solidFill>
+          <a:ln>
+            <a:noFill/>
+          </a:ln>
+          <a:effectLst/>
+        </p:spPr>
+        <p:style>
+          <a:lnRef idx="1">
+            <a:schemeClr val="accent1"/>
+          </a:lnRef>
+          <a:fillRef idx="3">
+            <a:schemeClr val="accent1"/>
+          </a:fillRef>
+          <a:effectRef idx="2">
+            <a:schemeClr val="accent1"/>
+          </a:effectRef>
+          <a:fontRef idx="minor">
+            <a:schemeClr val="lt1"/>
+          </a:fontRef>
+        </p:style>
+        <p:txBody>
+          <a:bodyPr rtlCol="0" anchor="ctr" lIns="0" rIns="0" tIns="0" bIns="0"/>
+          <a:lstStyle/>
+          <a:p>
+            <a:pPr algn="ctr"/>
+          </a:p>
+        </p:txBody>
+      </p:sp>
+      <p:sp>
+        <p:nvSpPr>
+          <p:cNvPr id="50" name="TextBox 49"/>
+          <p:cNvSpPr txBox="1"/>
+          <p:nvPr/>
+        </p:nvSpPr>
+        <p:spPr>
+          <a:xfrm>
+            <a:off x="438912" y="3355848"/>
+            <a:ext cx="530352" cy="274320"/>
+          </a:xfrm>
+          <a:prstGeom prst="rect">
+            <a:avLst/>
+          </a:prstGeom>
+          <a:noFill/>
+        </p:spPr>
+        <p:txBody>
+          <a:bodyPr wrap="square" lIns="0" rIns="0" tIns="0" bIns="0" anchor="t">
+            <a:spAutoFit/>
+          </a:bodyPr>
+          <a:lstStyle/>
+          <a:p>
+            <a:pPr algn="ctr"/>
+            <a:r>
+              <a:rPr sz="950" b="1" i="0">
+                <a:solidFill>
+                  <a:srgbClr val="1428A0"/>
+                </a:solidFill>
+                <a:latin typeface="Calibri"/>
+              </a:rPr>
+              <a:t>MB-2</a:t>
+            </a:r>
+          </a:p>
+        </p:txBody>
+      </p:sp>
+      <p:sp>
+        <p:nvSpPr>
+          <p:cNvPr id="51" name="Rectangle 50"/>
+          <p:cNvSpPr/>
+          <p:nvPr/>
+        </p:nvSpPr>
+        <p:spPr>
+          <a:xfrm>
+            <a:off x="1005840" y="3282696"/>
+            <a:ext cx="2377440" cy="393192"/>
+          </a:xfrm>
+          <a:prstGeom prst="rect">
+            <a:avLst/>
+          </a:prstGeom>
+          <a:solidFill>
+            <a:srgbClr val="FEF3C7"/>
+          </a:solidFill>
+          <a:ln>
+            <a:solidFill>
+              <a:srgbClr val="D1D5DB"/>
+            </a:solidFill>
+          </a:ln>
+          <a:effectLst/>
+        </p:spPr>
+        <p:style>
+          <a:lnRef idx="1">
+            <a:schemeClr val="accent1"/>
+          </a:lnRef>
+          <a:fillRef idx="3">
+            <a:schemeClr val="accent1"/>
+          </a:fillRef>
+          <a:effectRef idx="2">
+            <a:schemeClr val="accent1"/>
+          </a:effectRef>
+          <a:fontRef idx="minor">
+            <a:schemeClr val="lt1"/>
+          </a:fontRef>
+        </p:style>
+        <p:txBody>
+          <a:bodyPr rtlCol="0" anchor="ctr" lIns="0" rIns="0" tIns="0" bIns="0"/>
+          <a:lstStyle/>
+          <a:p>
+            <a:pPr algn="ctr"/>
+          </a:p>
+        </p:txBody>
+      </p:sp>
+      <p:sp>
+        <p:nvSpPr>
+          <p:cNvPr id="52" name="TextBox 51"/>
+          <p:cNvSpPr txBox="1"/>
+          <p:nvPr/>
+        </p:nvSpPr>
+        <p:spPr>
+          <a:xfrm>
+            <a:off x="1078992" y="3374136"/>
+            <a:ext cx="2231136" cy="274320"/>
+          </a:xfrm>
+          <a:prstGeom prst="rect">
+            <a:avLst/>
+          </a:prstGeom>
+          <a:noFill/>
+        </p:spPr>
+        <p:txBody>
+          <a:bodyPr wrap="square" lIns="0" rIns="0" tIns="0" bIns="0" anchor="t">
+            <a:spAutoFit/>
+          </a:bodyPr>
+          <a:lstStyle/>
+          <a:p>
+            <a:pPr algn="l"/>
+            <a:r>
+              <a:rPr sz="900" b="1" i="0">
+                <a:solidFill>
+                  <a:srgbClr val="1A1A1A"/>
+                </a:solidFill>
+                <a:latin typeface="맑은 고딕"/>
+              </a:rPr>
+              <a:t>동서 균형 공급망</a:t>
+            </a:r>
+          </a:p>
+        </p:txBody>
+      </p:sp>
+      <p:sp>
+        <p:nvSpPr>
+          <p:cNvPr id="53" name="Rectangle 52"/>
+          <p:cNvSpPr/>
+          <p:nvPr/>
+        </p:nvSpPr>
+        <p:spPr>
+          <a:xfrm>
+            <a:off x="3383280" y="3282696"/>
+            <a:ext cx="4023360" cy="393192"/>
+          </a:xfrm>
+          <a:prstGeom prst="rect">
+            <a:avLst/>
+          </a:prstGeom>
+          <a:solidFill>
+            <a:srgbClr val="FEF3C7"/>
+          </a:solidFill>
+          <a:ln>
+            <a:solidFill>
+              <a:srgbClr val="D1D5DB"/>
+            </a:solidFill>
+          </a:ln>
+          <a:effectLst/>
+        </p:spPr>
+        <p:style>
+          <a:lnRef idx="1">
+            <a:schemeClr val="accent1"/>
+          </a:lnRef>
+          <a:fillRef idx="3">
+            <a:schemeClr val="accent1"/>
+          </a:fillRef>
+          <a:effectRef idx="2">
+            <a:schemeClr val="accent1"/>
+          </a:effectRef>
+          <a:fontRef idx="minor">
+            <a:schemeClr val="lt1"/>
+          </a:fontRef>
+        </p:style>
+        <p:txBody>
+          <a:bodyPr rtlCol="0" anchor="ctr" lIns="0" rIns="0" tIns="0" bIns="0"/>
+          <a:lstStyle/>
+          <a:p>
+            <a:pPr algn="ctr"/>
+          </a:p>
+        </p:txBody>
+      </p:sp>
+      <p:sp>
+        <p:nvSpPr>
+          <p:cNvPr id="54" name="TextBox 53"/>
+          <p:cNvSpPr txBox="1"/>
+          <p:nvPr/>
+        </p:nvSpPr>
+        <p:spPr>
+          <a:xfrm>
+            <a:off x="3474720" y="3374136"/>
+            <a:ext cx="3840480" cy="274320"/>
+          </a:xfrm>
+          <a:prstGeom prst="rect">
+            <a:avLst/>
+          </a:prstGeom>
+          <a:noFill/>
+        </p:spPr>
+        <p:txBody>
+          <a:bodyPr wrap="square" lIns="0" rIns="0" tIns="0" bIns="0" anchor="t">
+            <a:spAutoFit/>
+          </a:bodyPr>
+          <a:lstStyle/>
+          <a:p>
+            <a:pPr algn="l"/>
+            <a:r>
+              <a:rPr sz="850" b="0" i="0">
+                <a:solidFill>
+                  <a:srgbClr val="1A1A1A"/>
+                </a:solidFill>
+                <a:latin typeface="맑은 고딕"/>
+              </a:rPr>
+              <a:t>5거점 구축 (한·미·일·중·인도 계획), 시안 매년 갱신 리스크</a:t>
+            </a:r>
+          </a:p>
+        </p:txBody>
+      </p:sp>
+      <p:sp>
+        <p:nvSpPr>
+          <p:cNvPr id="55" name="Rectangle 54"/>
+          <p:cNvSpPr/>
+          <p:nvPr/>
+        </p:nvSpPr>
+        <p:spPr>
+          <a:xfrm>
+            <a:off x="7406640" y="3282696"/>
+            <a:ext cx="3291840" cy="393192"/>
+          </a:xfrm>
+          <a:prstGeom prst="rect">
+            <a:avLst/>
+          </a:prstGeom>
+          <a:solidFill>
+            <a:srgbClr val="FEF3C7"/>
+          </a:solidFill>
+          <a:ln>
+            <a:solidFill>
+              <a:srgbClr val="D1D5DB"/>
+            </a:solidFill>
+          </a:ln>
+          <a:effectLst/>
+        </p:spPr>
+        <p:style>
+          <a:lnRef idx="1">
+            <a:schemeClr val="accent1"/>
+          </a:lnRef>
+          <a:fillRef idx="3">
+            <a:schemeClr val="accent1"/>
+          </a:fillRef>
+          <a:effectRef idx="2">
+            <a:schemeClr val="accent1"/>
+          </a:effectRef>
+          <a:fontRef idx="minor">
+            <a:schemeClr val="lt1"/>
+          </a:fontRef>
+        </p:style>
+        <p:txBody>
+          <a:bodyPr rtlCol="0" anchor="ctr" lIns="0" rIns="0" tIns="0" bIns="0"/>
+          <a:lstStyle/>
+          <a:p>
+            <a:pPr algn="ctr"/>
+          </a:p>
+        </p:txBody>
+      </p:sp>
+      <p:sp>
+        <p:nvSpPr>
+          <p:cNvPr id="56" name="TextBox 55"/>
+          <p:cNvSpPr txBox="1"/>
+          <p:nvPr/>
+        </p:nvSpPr>
+        <p:spPr>
+          <a:xfrm>
+            <a:off x="7498080" y="3374136"/>
+            <a:ext cx="3108960" cy="274320"/>
+          </a:xfrm>
+          <a:prstGeom prst="rect">
+            <a:avLst/>
+          </a:prstGeom>
+          <a:noFill/>
+        </p:spPr>
+        <p:txBody>
+          <a:bodyPr wrap="square" lIns="0" rIns="0" tIns="0" bIns="0" anchor="t">
+            <a:spAutoFit/>
+          </a:bodyPr>
+          <a:lstStyle/>
+          <a:p>
+            <a:pPr algn="l"/>
+            <a:r>
+              <a:rPr sz="850" b="0" i="0">
+                <a:solidFill>
+                  <a:srgbClr val="1A1A1A"/>
+                </a:solidFill>
+                <a:latin typeface="맑은 고딕"/>
+              </a:rPr>
+              <a:t>2026 Q4 시안 라이선스 + CHIPS 2.0</a:t>
+            </a:r>
+          </a:p>
+        </p:txBody>
+      </p:sp>
+      <p:sp>
+        <p:nvSpPr>
+          <p:cNvPr id="57" name="Rectangle 56"/>
+          <p:cNvSpPr/>
+          <p:nvPr/>
+        </p:nvSpPr>
+        <p:spPr>
+          <a:xfrm>
+            <a:off x="10698480" y="3282696"/>
+            <a:ext cx="1097280" cy="393192"/>
+          </a:xfrm>
+          <a:prstGeom prst="rect">
+            <a:avLst/>
+          </a:prstGeom>
+          <a:solidFill>
+            <a:srgbClr val="FEF3C7"/>
+          </a:solidFill>
+          <a:ln>
+            <a:solidFill>
+              <a:srgbClr val="D1D5DB"/>
+            </a:solidFill>
+          </a:ln>
+          <a:effectLst/>
+        </p:spPr>
+        <p:style>
+          <a:lnRef idx="1">
+            <a:schemeClr val="accent1"/>
+          </a:lnRef>
+          <a:fillRef idx="3">
+            <a:schemeClr val="accent1"/>
+          </a:fillRef>
+          <a:effectRef idx="2">
+            <a:schemeClr val="accent1"/>
+          </a:effectRef>
+          <a:fontRef idx="minor">
+            <a:schemeClr val="lt1"/>
+          </a:fontRef>
+        </p:style>
+        <p:txBody>
+          <a:bodyPr rtlCol="0" anchor="ctr" lIns="0" rIns="0" tIns="0" bIns="0"/>
+          <a:lstStyle/>
+          <a:p>
+            <a:pPr algn="ctr"/>
+          </a:p>
+        </p:txBody>
+      </p:sp>
+      <p:sp>
+        <p:nvSpPr>
+          <p:cNvPr id="58" name="TextBox 57"/>
+          <p:cNvSpPr txBox="1"/>
+          <p:nvPr/>
+        </p:nvSpPr>
+        <p:spPr>
+          <a:xfrm>
+            <a:off x="10698480" y="3374136"/>
+            <a:ext cx="1097280" cy="274320"/>
+          </a:xfrm>
+          <a:prstGeom prst="rect">
+            <a:avLst/>
+          </a:prstGeom>
+          <a:noFill/>
+        </p:spPr>
+        <p:txBody>
+          <a:bodyPr wrap="square" lIns="0" rIns="0" tIns="0" bIns="0" anchor="t">
+            <a:spAutoFit/>
+          </a:bodyPr>
+          <a:lstStyle/>
+          <a:p>
+            <a:pPr algn="ctr"/>
+            <a:r>
+              <a:rPr sz="1000" b="1" i="0">
+                <a:solidFill>
+                  <a:srgbClr val="1428A0"/>
+                </a:solidFill>
+                <a:latin typeface="Calibri"/>
+              </a:rPr>
+              <a:t>✅</a:t>
+            </a:r>
+          </a:p>
+        </p:txBody>
+      </p:sp>
+      <p:sp>
+        <p:nvSpPr>
+          <p:cNvPr id="59" name="Rectangle 58"/>
+          <p:cNvSpPr/>
+          <p:nvPr/>
+        </p:nvSpPr>
+        <p:spPr>
+          <a:xfrm>
+            <a:off x="365760" y="3675888"/>
+            <a:ext cx="640080" cy="393192"/>
+          </a:xfrm>
+          <a:prstGeom prst="rect">
+            <a:avLst/>
+          </a:prstGeom>
+          <a:solidFill>
+            <a:srgbClr val="FEF3C7"/>
+          </a:solidFill>
+          <a:ln>
+            <a:solidFill>
+              <a:srgbClr val="D1D5DB"/>
+            </a:solidFill>
+          </a:ln>
+          <a:effectLst/>
+        </p:spPr>
+        <p:style>
+          <a:lnRef idx="1">
+            <a:schemeClr val="accent1"/>
+          </a:lnRef>
+          <a:fillRef idx="3">
+            <a:schemeClr val="accent1"/>
+          </a:fillRef>
+          <a:effectRef idx="2">
+            <a:schemeClr val="accent1"/>
+          </a:effectRef>
+          <a:fontRef idx="minor">
+            <a:schemeClr val="lt1"/>
+          </a:fontRef>
+        </p:style>
+        <p:txBody>
+          <a:bodyPr rtlCol="0" anchor="ctr" lIns="0" rIns="0" tIns="0" bIns="0"/>
+          <a:lstStyle/>
+          <a:p>
+            <a:pPr algn="ctr"/>
+          </a:p>
+        </p:txBody>
+      </p:sp>
+      <p:sp>
+        <p:nvSpPr>
+          <p:cNvPr id="60" name="Rectangle 59"/>
+          <p:cNvSpPr/>
+          <p:nvPr/>
+        </p:nvSpPr>
+        <p:spPr>
+          <a:xfrm>
+            <a:off x="365760" y="3675888"/>
+            <a:ext cx="54864" cy="393192"/>
+          </a:xfrm>
+          <a:prstGeom prst="rect">
+            <a:avLst/>
+          </a:prstGeom>
+          <a:solidFill>
+            <a:srgbClr val="1428A0"/>
+          </a:solidFill>
+          <a:ln>
+            <a:noFill/>
+          </a:ln>
+          <a:effectLst/>
+        </p:spPr>
+        <p:style>
+          <a:lnRef idx="1">
+            <a:schemeClr val="accent1"/>
+          </a:lnRef>
+          <a:fillRef idx="3">
+            <a:schemeClr val="accent1"/>
+          </a:fillRef>
+          <a:effectRef idx="2">
+            <a:schemeClr val="accent1"/>
+          </a:effectRef>
+          <a:fontRef idx="minor">
+            <a:schemeClr val="lt1"/>
+          </a:fontRef>
+        </p:style>
+        <p:txBody>
+          <a:bodyPr rtlCol="0" anchor="ctr" lIns="0" rIns="0" tIns="0" bIns="0"/>
+          <a:lstStyle/>
+          <a:p>
+            <a:pPr algn="ctr"/>
+          </a:p>
+        </p:txBody>
+      </p:sp>
+      <p:sp>
+        <p:nvSpPr>
+          <p:cNvPr id="61" name="TextBox 60"/>
+          <p:cNvSpPr txBox="1"/>
+          <p:nvPr/>
+        </p:nvSpPr>
+        <p:spPr>
+          <a:xfrm>
+            <a:off x="438912" y="3749040"/>
+            <a:ext cx="530352" cy="274320"/>
+          </a:xfrm>
+          <a:prstGeom prst="rect">
+            <a:avLst/>
+          </a:prstGeom>
+          <a:noFill/>
+        </p:spPr>
+        <p:txBody>
+          <a:bodyPr wrap="square" lIns="0" rIns="0" tIns="0" bIns="0" anchor="t">
+            <a:spAutoFit/>
+          </a:bodyPr>
+          <a:lstStyle/>
+          <a:p>
+            <a:pPr algn="ctr"/>
+            <a:r>
+              <a:rPr sz="950" b="1" i="0">
+                <a:solidFill>
+                  <a:srgbClr val="1428A0"/>
+                </a:solidFill>
+                <a:latin typeface="Calibri"/>
+              </a:rPr>
+              <a:t>SD-1</a:t>
+            </a:r>
+          </a:p>
+        </p:txBody>
+      </p:sp>
+      <p:sp>
+        <p:nvSpPr>
+          <p:cNvPr id="62" name="Rectangle 61"/>
+          <p:cNvSpPr/>
+          <p:nvPr/>
+        </p:nvSpPr>
+        <p:spPr>
+          <a:xfrm>
+            <a:off x="1005840" y="3675888"/>
+            <a:ext cx="2377440" cy="393192"/>
+          </a:xfrm>
+          <a:prstGeom prst="rect">
+            <a:avLst/>
+          </a:prstGeom>
+          <a:solidFill>
+            <a:srgbClr val="FEF3C7"/>
+          </a:solidFill>
+          <a:ln>
+            <a:solidFill>
+              <a:srgbClr val="D1D5DB"/>
+            </a:solidFill>
+          </a:ln>
+          <a:effectLst/>
+        </p:spPr>
+        <p:style>
+          <a:lnRef idx="1">
+            <a:schemeClr val="accent1"/>
+          </a:lnRef>
+          <a:fillRef idx="3">
+            <a:schemeClr val="accent1"/>
+          </a:fillRef>
+          <a:effectRef idx="2">
+            <a:schemeClr val="accent1"/>
+          </a:effectRef>
+          <a:fontRef idx="minor">
+            <a:schemeClr val="lt1"/>
+          </a:fontRef>
+        </p:style>
+        <p:txBody>
+          <a:bodyPr rtlCol="0" anchor="ctr" lIns="0" rIns="0" tIns="0" bIns="0"/>
+          <a:lstStyle/>
+          <a:p>
+            <a:pPr algn="ctr"/>
+          </a:p>
+        </p:txBody>
+      </p:sp>
+      <p:sp>
+        <p:nvSpPr>
+          <p:cNvPr id="63" name="TextBox 62"/>
+          <p:cNvSpPr txBox="1"/>
+          <p:nvPr/>
+        </p:nvSpPr>
+        <p:spPr>
+          <a:xfrm>
+            <a:off x="1078992" y="3767328"/>
+            <a:ext cx="2231136" cy="274320"/>
+          </a:xfrm>
+          <a:prstGeom prst="rect">
+            <a:avLst/>
+          </a:prstGeom>
+          <a:noFill/>
+        </p:spPr>
+        <p:txBody>
+          <a:bodyPr wrap="square" lIns="0" rIns="0" tIns="0" bIns="0" anchor="t">
+            <a:spAutoFit/>
+          </a:bodyPr>
+          <a:lstStyle/>
+          <a:p>
+            <a:pPr algn="l"/>
+            <a:r>
+              <a:rPr sz="900" b="1" i="0">
+                <a:solidFill>
+                  <a:srgbClr val="1A1A1A"/>
+                </a:solidFill>
+                <a:latin typeface="맑은 고딕"/>
+              </a:rPr>
+              <a:t>HBM 조직 독립 P&amp;L</a:t>
+            </a:r>
+          </a:p>
+        </p:txBody>
+      </p:sp>
+      <p:sp>
+        <p:nvSpPr>
+          <p:cNvPr id="64" name="Rectangle 63"/>
+          <p:cNvSpPr/>
+          <p:nvPr/>
+        </p:nvSpPr>
+        <p:spPr>
+          <a:xfrm>
+            <a:off x="3383280" y="3675888"/>
+            <a:ext cx="4023360" cy="393192"/>
+          </a:xfrm>
+          <a:prstGeom prst="rect">
+            <a:avLst/>
+          </a:prstGeom>
+          <a:solidFill>
+            <a:srgbClr val="FEF3C7"/>
+          </a:solidFill>
+          <a:ln>
+            <a:solidFill>
+              <a:srgbClr val="D1D5DB"/>
+            </a:solidFill>
+          </a:ln>
+          <a:effectLst/>
+        </p:spPr>
+        <p:style>
+          <a:lnRef idx="1">
+            <a:schemeClr val="accent1"/>
+          </a:lnRef>
+          <a:fillRef idx="3">
+            <a:schemeClr val="accent1"/>
+          </a:fillRef>
+          <a:effectRef idx="2">
+            <a:schemeClr val="accent1"/>
+          </a:effectRef>
+          <a:fontRef idx="minor">
+            <a:schemeClr val="lt1"/>
+          </a:fontRef>
+        </p:style>
+        <p:txBody>
+          <a:bodyPr rtlCol="0" anchor="ctr" lIns="0" rIns="0" tIns="0" bIns="0"/>
+          <a:lstStyle/>
+          <a:p>
+            <a:pPr algn="ctr"/>
+          </a:p>
+        </p:txBody>
+      </p:sp>
+      <p:sp>
+        <p:nvSpPr>
+          <p:cNvPr id="65" name="TextBox 64"/>
+          <p:cNvSpPr txBox="1"/>
+          <p:nvPr/>
+        </p:nvSpPr>
+        <p:spPr>
+          <a:xfrm>
+            <a:off x="3474720" y="3767328"/>
+            <a:ext cx="3840480" cy="274320"/>
+          </a:xfrm>
+          <a:prstGeom prst="rect">
+            <a:avLst/>
+          </a:prstGeom>
+          <a:noFill/>
+        </p:spPr>
+        <p:txBody>
+          <a:bodyPr wrap="square" lIns="0" rIns="0" tIns="0" bIns="0" anchor="t">
+            <a:spAutoFit/>
+          </a:bodyPr>
+          <a:lstStyle/>
+          <a:p>
+            <a:pPr algn="l"/>
+            <a:r>
+              <a:rPr sz="850" b="0" i="0">
+                <a:solidFill>
+                  <a:srgbClr val="1A1A1A"/>
+                </a:solidFill>
+                <a:latin typeface="맑은 고딕"/>
+              </a:rPr>
+              <a:t>메모리사업부 내 통합 운영, 분리 P&amp;L 미공개</a:t>
+            </a:r>
+          </a:p>
+        </p:txBody>
+      </p:sp>
+      <p:sp>
+        <p:nvSpPr>
+          <p:cNvPr id="66" name="Rectangle 65"/>
+          <p:cNvSpPr/>
+          <p:nvPr/>
+        </p:nvSpPr>
+        <p:spPr>
+          <a:xfrm>
+            <a:off x="7406640" y="3675888"/>
+            <a:ext cx="3291840" cy="393192"/>
+          </a:xfrm>
+          <a:prstGeom prst="rect">
+            <a:avLst/>
+          </a:prstGeom>
+          <a:solidFill>
+            <a:srgbClr val="FEF3C7"/>
+          </a:solidFill>
+          <a:ln>
+            <a:solidFill>
+              <a:srgbClr val="D1D5DB"/>
+            </a:solidFill>
+          </a:ln>
+          <a:effectLst/>
+        </p:spPr>
+        <p:style>
+          <a:lnRef idx="1">
+            <a:schemeClr val="accent1"/>
+          </a:lnRef>
+          <a:fillRef idx="3">
+            <a:schemeClr val="accent1"/>
+          </a:fillRef>
+          <a:effectRef idx="2">
+            <a:schemeClr val="accent1"/>
+          </a:effectRef>
+          <a:fontRef idx="minor">
+            <a:schemeClr val="lt1"/>
+          </a:fontRef>
+        </p:style>
+        <p:txBody>
+          <a:bodyPr rtlCol="0" anchor="ctr" lIns="0" rIns="0" tIns="0" bIns="0"/>
+          <a:lstStyle/>
+          <a:p>
+            <a:pPr algn="ctr"/>
+          </a:p>
+        </p:txBody>
+      </p:sp>
+      <p:sp>
+        <p:nvSpPr>
+          <p:cNvPr id="67" name="TextBox 66"/>
+          <p:cNvSpPr txBox="1"/>
+          <p:nvPr/>
+        </p:nvSpPr>
+        <p:spPr>
+          <a:xfrm>
+            <a:off x="7498080" y="3767328"/>
+            <a:ext cx="3108960" cy="274320"/>
+          </a:xfrm>
+          <a:prstGeom prst="rect">
+            <a:avLst/>
+          </a:prstGeom>
+          <a:noFill/>
+        </p:spPr>
+        <p:txBody>
+          <a:bodyPr wrap="square" lIns="0" rIns="0" tIns="0" bIns="0" anchor="t">
+            <a:spAutoFit/>
+          </a:bodyPr>
+          <a:lstStyle/>
+          <a:p>
+            <a:pPr algn="l"/>
+            <a:r>
+              <a:rPr sz="850" b="0" i="0">
+                <a:solidFill>
+                  <a:srgbClr val="1A1A1A"/>
+                </a:solidFill>
+                <a:latin typeface="맑은 고딕"/>
+              </a:rPr>
+              <a:t>2026 H1 P&amp;L 분리 결정 (목표)</a:t>
+            </a:r>
+          </a:p>
+        </p:txBody>
+      </p:sp>
+      <p:sp>
+        <p:nvSpPr>
+          <p:cNvPr id="68" name="Rectangle 67"/>
+          <p:cNvSpPr/>
+          <p:nvPr/>
+        </p:nvSpPr>
+        <p:spPr>
+          <a:xfrm>
+            <a:off x="10698480" y="3675888"/>
+            <a:ext cx="1097280" cy="393192"/>
+          </a:xfrm>
+          <a:prstGeom prst="rect">
+            <a:avLst/>
+          </a:prstGeom>
+          <a:solidFill>
+            <a:srgbClr val="FEF3C7"/>
+          </a:solidFill>
+          <a:ln>
+            <a:solidFill>
+              <a:srgbClr val="D1D5DB"/>
+            </a:solidFill>
+          </a:ln>
+          <a:effectLst/>
+        </p:spPr>
+        <p:style>
+          <a:lnRef idx="1">
+            <a:schemeClr val="accent1"/>
+          </a:lnRef>
+          <a:fillRef idx="3">
+            <a:schemeClr val="accent1"/>
+          </a:fillRef>
+          <a:effectRef idx="2">
+            <a:schemeClr val="accent1"/>
+          </a:effectRef>
+          <a:fontRef idx="minor">
+            <a:schemeClr val="lt1"/>
+          </a:fontRef>
+        </p:style>
+        <p:txBody>
+          <a:bodyPr rtlCol="0" anchor="ctr" lIns="0" rIns="0" tIns="0" bIns="0"/>
+          <a:lstStyle/>
+          <a:p>
+            <a:pPr algn="ctr"/>
+          </a:p>
+        </p:txBody>
+      </p:sp>
+      <p:sp>
+        <p:nvSpPr>
+          <p:cNvPr id="69" name="TextBox 68"/>
+          <p:cNvSpPr txBox="1"/>
+          <p:nvPr/>
+        </p:nvSpPr>
+        <p:spPr>
+          <a:xfrm>
+            <a:off x="10698480" y="3767328"/>
+            <a:ext cx="1097280" cy="274320"/>
+          </a:xfrm>
+          <a:prstGeom prst="rect">
+            <a:avLst/>
+          </a:prstGeom>
+          <a:noFill/>
+        </p:spPr>
+        <p:txBody>
+          <a:bodyPr wrap="square" lIns="0" rIns="0" tIns="0" bIns="0" anchor="t">
+            <a:spAutoFit/>
+          </a:bodyPr>
+          <a:lstStyle/>
+          <a:p>
+            <a:pPr algn="ctr"/>
+            <a:r>
+              <a:rPr sz="1000" b="1" i="0">
+                <a:solidFill>
+                  <a:srgbClr val="1428A0"/>
+                </a:solidFill>
+                <a:latin typeface="Calibri"/>
+              </a:rPr>
+              <a:t>⚠️</a:t>
+            </a:r>
+          </a:p>
+        </p:txBody>
+      </p:sp>
+      <p:sp>
+        <p:nvSpPr>
+          <p:cNvPr id="70" name="Rectangle 69"/>
+          <p:cNvSpPr/>
+          <p:nvPr/>
+        </p:nvSpPr>
+        <p:spPr>
+          <a:xfrm>
+            <a:off x="365760" y="4069080"/>
+            <a:ext cx="640080" cy="393192"/>
+          </a:xfrm>
+          <a:prstGeom prst="rect">
+            <a:avLst/>
+          </a:prstGeom>
+          <a:solidFill>
+            <a:srgbClr val="FEF3C7"/>
+          </a:solidFill>
+          <a:ln>
+            <a:solidFill>
+              <a:srgbClr val="D1D5DB"/>
+            </a:solidFill>
+          </a:ln>
+          <a:effectLst/>
+        </p:spPr>
+        <p:style>
+          <a:lnRef idx="1">
+            <a:schemeClr val="accent1"/>
+          </a:lnRef>
+          <a:fillRef idx="3">
+            <a:schemeClr val="accent1"/>
+          </a:fillRef>
+          <a:effectRef idx="2">
+            <a:schemeClr val="accent1"/>
+          </a:effectRef>
+          <a:fontRef idx="minor">
+            <a:schemeClr val="lt1"/>
+          </a:fontRef>
+        </p:style>
+        <p:txBody>
+          <a:bodyPr rtlCol="0" anchor="ctr" lIns="0" rIns="0" tIns="0" bIns="0"/>
+          <a:lstStyle/>
+          <a:p>
+            <a:pPr algn="ctr"/>
+          </a:p>
+        </p:txBody>
+      </p:sp>
+      <p:sp>
+        <p:nvSpPr>
+          <p:cNvPr id="71" name="Rectangle 70"/>
+          <p:cNvSpPr/>
+          <p:nvPr/>
+        </p:nvSpPr>
+        <p:spPr>
+          <a:xfrm>
+            <a:off x="365760" y="4069080"/>
+            <a:ext cx="54864" cy="393192"/>
+          </a:xfrm>
+          <a:prstGeom prst="rect">
+            <a:avLst/>
+          </a:prstGeom>
+          <a:solidFill>
+            <a:srgbClr val="1428A0"/>
+          </a:solidFill>
+          <a:ln>
+            <a:noFill/>
+          </a:ln>
+          <a:effectLst/>
+        </p:spPr>
+        <p:style>
+          <a:lnRef idx="1">
+            <a:schemeClr val="accent1"/>
+          </a:lnRef>
+          <a:fillRef idx="3">
+            <a:schemeClr val="accent1"/>
+          </a:fillRef>
+          <a:effectRef idx="2">
+            <a:schemeClr val="accent1"/>
+          </a:effectRef>
+          <a:fontRef idx="minor">
+            <a:schemeClr val="lt1"/>
+          </a:fontRef>
+        </p:style>
+        <p:txBody>
+          <a:bodyPr rtlCol="0" anchor="ctr" lIns="0" rIns="0" tIns="0" bIns="0"/>
+          <a:lstStyle/>
+          <a:p>
+            <a:pPr algn="ctr"/>
+          </a:p>
+        </p:txBody>
+      </p:sp>
+      <p:sp>
+        <p:nvSpPr>
+          <p:cNvPr id="72" name="TextBox 71"/>
+          <p:cNvSpPr txBox="1"/>
+          <p:nvPr/>
+        </p:nvSpPr>
+        <p:spPr>
+          <a:xfrm>
+            <a:off x="438912" y="4142232"/>
+            <a:ext cx="530352" cy="274320"/>
+          </a:xfrm>
+          <a:prstGeom prst="rect">
+            <a:avLst/>
+          </a:prstGeom>
+          <a:noFill/>
+        </p:spPr>
+        <p:txBody>
+          <a:bodyPr wrap="square" lIns="0" rIns="0" tIns="0" bIns="0" anchor="t">
+            <a:spAutoFit/>
+          </a:bodyPr>
+          <a:lstStyle/>
+          <a:p>
+            <a:pPr algn="ctr"/>
+            <a:r>
+              <a:rPr sz="950" b="1" i="0">
+                <a:solidFill>
+                  <a:srgbClr val="1428A0"/>
+                </a:solidFill>
+                <a:latin typeface="Calibri"/>
+              </a:rPr>
+              <a:t>RS-5</a:t>
+            </a:r>
+          </a:p>
+        </p:txBody>
+      </p:sp>
+      <p:sp>
+        <p:nvSpPr>
+          <p:cNvPr id="73" name="Rectangle 72"/>
+          <p:cNvSpPr/>
+          <p:nvPr/>
+        </p:nvSpPr>
+        <p:spPr>
+          <a:xfrm>
+            <a:off x="1005840" y="4069080"/>
+            <a:ext cx="2377440" cy="393192"/>
+          </a:xfrm>
+          <a:prstGeom prst="rect">
+            <a:avLst/>
+          </a:prstGeom>
+          <a:solidFill>
+            <a:srgbClr val="FEF3C7"/>
+          </a:solidFill>
+          <a:ln>
+            <a:solidFill>
+              <a:srgbClr val="D1D5DB"/>
+            </a:solidFill>
+          </a:ln>
+          <a:effectLst/>
+        </p:spPr>
+        <p:style>
+          <a:lnRef idx="1">
+            <a:schemeClr val="accent1"/>
+          </a:lnRef>
+          <a:fillRef idx="3">
+            <a:schemeClr val="accent1"/>
+          </a:fillRef>
+          <a:effectRef idx="2">
+            <a:schemeClr val="accent1"/>
+          </a:effectRef>
+          <a:fontRef idx="minor">
+            <a:schemeClr val="lt1"/>
+          </a:fontRef>
+        </p:style>
+        <p:txBody>
+          <a:bodyPr rtlCol="0" anchor="ctr" lIns="0" rIns="0" tIns="0" bIns="0"/>
+          <a:lstStyle/>
+          <a:p>
+            <a:pPr algn="ctr"/>
+          </a:p>
+        </p:txBody>
+      </p:sp>
+      <p:sp>
+        <p:nvSpPr>
+          <p:cNvPr id="74" name="TextBox 73"/>
+          <p:cNvSpPr txBox="1"/>
+          <p:nvPr/>
+        </p:nvSpPr>
+        <p:spPr>
+          <a:xfrm>
+            <a:off x="1078992" y="4160520"/>
+            <a:ext cx="2231136" cy="274320"/>
+          </a:xfrm>
+          <a:prstGeom prst="rect">
+            <a:avLst/>
+          </a:prstGeom>
+          <a:noFill/>
+        </p:spPr>
+        <p:txBody>
+          <a:bodyPr wrap="square" lIns="0" rIns="0" tIns="0" bIns="0" anchor="t">
+            <a:spAutoFit/>
+          </a:bodyPr>
+          <a:lstStyle/>
+          <a:p>
+            <a:pPr algn="l"/>
+            <a:r>
+              <a:rPr sz="900" b="1" i="0">
+                <a:solidFill>
+                  <a:srgbClr val="1A1A1A"/>
+                </a:solidFill>
+                <a:latin typeface="맑은 고딕"/>
+              </a:rPr>
+              <a:t>재무 규율 + 초과이익 재투자</a:t>
+            </a:r>
+          </a:p>
+        </p:txBody>
+      </p:sp>
+      <p:sp>
+        <p:nvSpPr>
+          <p:cNvPr id="75" name="Rectangle 74"/>
+          <p:cNvSpPr/>
+          <p:nvPr/>
+        </p:nvSpPr>
+        <p:spPr>
+          <a:xfrm>
+            <a:off x="3383280" y="4069080"/>
+            <a:ext cx="4023360" cy="393192"/>
+          </a:xfrm>
+          <a:prstGeom prst="rect">
+            <a:avLst/>
+          </a:prstGeom>
+          <a:solidFill>
+            <a:srgbClr val="FEF3C7"/>
+          </a:solidFill>
+          <a:ln>
+            <a:solidFill>
+              <a:srgbClr val="D1D5DB"/>
+            </a:solidFill>
+          </a:ln>
+          <a:effectLst/>
+        </p:spPr>
+        <p:style>
+          <a:lnRef idx="1">
+            <a:schemeClr val="accent1"/>
+          </a:lnRef>
+          <a:fillRef idx="3">
+            <a:schemeClr val="accent1"/>
+          </a:fillRef>
+          <a:effectRef idx="2">
+            <a:schemeClr val="accent1"/>
+          </a:effectRef>
+          <a:fontRef idx="minor">
+            <a:schemeClr val="lt1"/>
+          </a:fontRef>
+        </p:style>
+        <p:txBody>
+          <a:bodyPr rtlCol="0" anchor="ctr" lIns="0" rIns="0" tIns="0" bIns="0"/>
+          <a:lstStyle/>
+          <a:p>
+            <a:pPr algn="ctr"/>
+          </a:p>
+        </p:txBody>
+      </p:sp>
+      <p:sp>
+        <p:nvSpPr>
+          <p:cNvPr id="76" name="TextBox 75"/>
+          <p:cNvSpPr txBox="1"/>
+          <p:nvPr/>
+        </p:nvSpPr>
+        <p:spPr>
+          <a:xfrm>
+            <a:off x="3474720" y="4160520"/>
+            <a:ext cx="3840480" cy="274320"/>
+          </a:xfrm>
+          <a:prstGeom prst="rect">
+            <a:avLst/>
+          </a:prstGeom>
+          <a:noFill/>
+        </p:spPr>
+        <p:txBody>
+          <a:bodyPr wrap="square" lIns="0" rIns="0" tIns="0" bIns="0" anchor="t">
+            <a:spAutoFit/>
+          </a:bodyPr>
+          <a:lstStyle/>
+          <a:p>
+            <a:pPr algn="l"/>
+            <a:r>
+              <a:rPr sz="850" b="0" i="0">
+                <a:solidFill>
+                  <a:srgbClr val="1A1A1A"/>
+                </a:solidFill>
+                <a:latin typeface="맑은 고딕"/>
+              </a:rPr>
+              <a:t>현금 $63B 강점, 다운사이클 capex 하한 정책 명문화 부재</a:t>
+            </a:r>
+          </a:p>
+        </p:txBody>
+      </p:sp>
+      <p:sp>
+        <p:nvSpPr>
+          <p:cNvPr id="77" name="Rectangle 76"/>
+          <p:cNvSpPr/>
+          <p:nvPr/>
+        </p:nvSpPr>
+        <p:spPr>
+          <a:xfrm>
+            <a:off x="7406640" y="4069080"/>
+            <a:ext cx="3291840" cy="393192"/>
+          </a:xfrm>
+          <a:prstGeom prst="rect">
+            <a:avLst/>
+          </a:prstGeom>
+          <a:solidFill>
+            <a:srgbClr val="FEF3C7"/>
+          </a:solidFill>
+          <a:ln>
+            <a:solidFill>
+              <a:srgbClr val="D1D5DB"/>
+            </a:solidFill>
+          </a:ln>
+          <a:effectLst/>
+        </p:spPr>
+        <p:style>
+          <a:lnRef idx="1">
+            <a:schemeClr val="accent1"/>
+          </a:lnRef>
+          <a:fillRef idx="3">
+            <a:schemeClr val="accent1"/>
+          </a:fillRef>
+          <a:effectRef idx="2">
+            <a:schemeClr val="accent1"/>
+          </a:effectRef>
+          <a:fontRef idx="minor">
+            <a:schemeClr val="lt1"/>
+          </a:fontRef>
+        </p:style>
+        <p:txBody>
+          <a:bodyPr rtlCol="0" anchor="ctr" lIns="0" rIns="0" tIns="0" bIns="0"/>
+          <a:lstStyle/>
+          <a:p>
+            <a:pPr algn="ctr"/>
+          </a:p>
+        </p:txBody>
+      </p:sp>
+      <p:sp>
+        <p:nvSpPr>
+          <p:cNvPr id="78" name="TextBox 77"/>
+          <p:cNvSpPr txBox="1"/>
+          <p:nvPr/>
+        </p:nvSpPr>
+        <p:spPr>
+          <a:xfrm>
+            <a:off x="7498080" y="4160520"/>
+            <a:ext cx="3108960" cy="274320"/>
+          </a:xfrm>
+          <a:prstGeom prst="rect">
+            <a:avLst/>
+          </a:prstGeom>
+          <a:noFill/>
+        </p:spPr>
+        <p:txBody>
+          <a:bodyPr wrap="square" lIns="0" rIns="0" tIns="0" bIns="0" anchor="t">
+            <a:spAutoFit/>
+          </a:bodyPr>
+          <a:lstStyle/>
+          <a:p>
+            <a:pPr algn="l"/>
+            <a:r>
+              <a:rPr sz="850" b="0" i="0">
+                <a:solidFill>
+                  <a:srgbClr val="1A1A1A"/>
+                </a:solidFill>
+                <a:latin typeface="맑은 고딕"/>
+              </a:rPr>
+              <a:t>2026 H1 이사회 결의 + IR 사전 공시</a:t>
+            </a:r>
+          </a:p>
+        </p:txBody>
+      </p:sp>
+      <p:sp>
+        <p:nvSpPr>
+          <p:cNvPr id="79" name="Rectangle 78"/>
+          <p:cNvSpPr/>
+          <p:nvPr/>
+        </p:nvSpPr>
+        <p:spPr>
+          <a:xfrm>
+            <a:off x="10698480" y="4069080"/>
+            <a:ext cx="1097280" cy="393192"/>
+          </a:xfrm>
+          <a:prstGeom prst="rect">
+            <a:avLst/>
+          </a:prstGeom>
+          <a:solidFill>
+            <a:srgbClr val="FEF3C7"/>
+          </a:solidFill>
+          <a:ln>
+            <a:solidFill>
+              <a:srgbClr val="D1D5DB"/>
+            </a:solidFill>
+          </a:ln>
+          <a:effectLst/>
+        </p:spPr>
+        <p:style>
+          <a:lnRef idx="1">
+            <a:schemeClr val="accent1"/>
+          </a:lnRef>
+          <a:fillRef idx="3">
+            <a:schemeClr val="accent1"/>
+          </a:fillRef>
+          <a:effectRef idx="2">
+            <a:schemeClr val="accent1"/>
+          </a:effectRef>
+          <a:fontRef idx="minor">
+            <a:schemeClr val="lt1"/>
+          </a:fontRef>
+        </p:style>
+        <p:txBody>
+          <a:bodyPr rtlCol="0" anchor="ctr" lIns="0" rIns="0" tIns="0" bIns="0"/>
+          <a:lstStyle/>
+          <a:p>
+            <a:pPr algn="ctr"/>
+          </a:p>
+        </p:txBody>
+      </p:sp>
+      <p:sp>
+        <p:nvSpPr>
+          <p:cNvPr id="80" name="TextBox 79"/>
+          <p:cNvSpPr txBox="1"/>
+          <p:nvPr/>
+        </p:nvSpPr>
+        <p:spPr>
+          <a:xfrm>
+            <a:off x="10698480" y="4160520"/>
+            <a:ext cx="1097280" cy="274320"/>
+          </a:xfrm>
+          <a:prstGeom prst="rect">
+            <a:avLst/>
+          </a:prstGeom>
+          <a:noFill/>
+        </p:spPr>
+        <p:txBody>
+          <a:bodyPr wrap="square" lIns="0" rIns="0" tIns="0" bIns="0" anchor="t">
+            <a:spAutoFit/>
+          </a:bodyPr>
+          <a:lstStyle/>
+          <a:p>
+            <a:pPr algn="ctr"/>
+            <a:r>
+              <a:rPr sz="1000" b="1" i="0">
+                <a:solidFill>
+                  <a:srgbClr val="1428A0"/>
+                </a:solidFill>
+                <a:latin typeface="Calibri"/>
+              </a:rPr>
+              <a:t>✅ / ⚠️</a:t>
+            </a:r>
+          </a:p>
+        </p:txBody>
+      </p:sp>
+      <p:sp>
+        <p:nvSpPr>
+          <p:cNvPr id="81" name="Rectangle 80"/>
+          <p:cNvSpPr/>
+          <p:nvPr/>
+        </p:nvSpPr>
+        <p:spPr>
+          <a:xfrm>
+            <a:off x="365760" y="4462272"/>
+            <a:ext cx="640080" cy="393192"/>
+          </a:xfrm>
+          <a:prstGeom prst="rect">
+            <a:avLst/>
+          </a:prstGeom>
+          <a:solidFill>
+            <a:srgbClr val="E8EEFC"/>
+          </a:solidFill>
+          <a:ln>
+            <a:solidFill>
+              <a:srgbClr val="D1D5DB"/>
+            </a:solidFill>
+          </a:ln>
+          <a:effectLst/>
+        </p:spPr>
+        <p:style>
+          <a:lnRef idx="1">
+            <a:schemeClr val="accent1"/>
+          </a:lnRef>
+          <a:fillRef idx="3">
+            <a:schemeClr val="accent1"/>
+          </a:fillRef>
+          <a:effectRef idx="2">
+            <a:schemeClr val="accent1"/>
+          </a:effectRef>
+          <a:fontRef idx="minor">
+            <a:schemeClr val="lt1"/>
+          </a:fontRef>
+        </p:style>
+        <p:txBody>
+          <a:bodyPr rtlCol="0" anchor="ctr" lIns="0" rIns="0" tIns="0" bIns="0"/>
+          <a:lstStyle/>
+          <a:p>
+            <a:pPr algn="ctr"/>
+          </a:p>
+        </p:txBody>
+      </p:sp>
+      <p:sp>
+        <p:nvSpPr>
+          <p:cNvPr id="82" name="Rectangle 81"/>
+          <p:cNvSpPr/>
+          <p:nvPr/>
+        </p:nvSpPr>
+        <p:spPr>
+          <a:xfrm>
+            <a:off x="365760" y="4462272"/>
+            <a:ext cx="54864" cy="393192"/>
+          </a:xfrm>
+          <a:prstGeom prst="rect">
+            <a:avLst/>
+          </a:prstGeom>
+          <a:solidFill>
+            <a:srgbClr val="D97706"/>
+          </a:solidFill>
+          <a:ln>
+            <a:noFill/>
+          </a:ln>
+          <a:effectLst/>
+        </p:spPr>
+        <p:style>
+          <a:lnRef idx="1">
+            <a:schemeClr val="accent1"/>
+          </a:lnRef>
+          <a:fillRef idx="3">
+            <a:schemeClr val="accent1"/>
+          </a:fillRef>
+          <a:effectRef idx="2">
+            <a:schemeClr val="accent1"/>
+          </a:effectRef>
+          <a:fontRef idx="minor">
+            <a:schemeClr val="lt1"/>
+          </a:fontRef>
+        </p:style>
+        <p:txBody>
+          <a:bodyPr rtlCol="0" anchor="ctr" lIns="0" rIns="0" tIns="0" bIns="0"/>
+          <a:lstStyle/>
+          <a:p>
+            <a:pPr algn="ctr"/>
+          </a:p>
+        </p:txBody>
+      </p:sp>
+      <p:sp>
+        <p:nvSpPr>
+          <p:cNvPr id="83" name="TextBox 82"/>
+          <p:cNvSpPr txBox="1"/>
+          <p:nvPr/>
+        </p:nvSpPr>
+        <p:spPr>
+          <a:xfrm>
+            <a:off x="438912" y="4535424"/>
+            <a:ext cx="530352" cy="274320"/>
+          </a:xfrm>
+          <a:prstGeom prst="rect">
+            <a:avLst/>
+          </a:prstGeom>
+          <a:noFill/>
+        </p:spPr>
+        <p:txBody>
+          <a:bodyPr wrap="square" lIns="0" rIns="0" tIns="0" bIns="0" anchor="t">
+            <a:spAutoFit/>
+          </a:bodyPr>
+          <a:lstStyle/>
+          <a:p>
+            <a:pPr algn="ctr"/>
+            <a:r>
+              <a:rPr sz="950" b="1" i="0">
+                <a:solidFill>
+                  <a:srgbClr val="D97706"/>
+                </a:solidFill>
+                <a:latin typeface="Calibri"/>
+              </a:rPr>
+              <a:t>SA-2</a:t>
+            </a:r>
+          </a:p>
+        </p:txBody>
+      </p:sp>
+      <p:sp>
+        <p:nvSpPr>
+          <p:cNvPr id="84" name="Rectangle 83"/>
+          <p:cNvSpPr/>
+          <p:nvPr/>
+        </p:nvSpPr>
+        <p:spPr>
+          <a:xfrm>
+            <a:off x="1005840" y="4462272"/>
+            <a:ext cx="2377440" cy="393192"/>
+          </a:xfrm>
+          <a:prstGeom prst="rect">
+            <a:avLst/>
+          </a:prstGeom>
+          <a:solidFill>
+            <a:srgbClr val="E8EEFC"/>
+          </a:solidFill>
+          <a:ln>
+            <a:solidFill>
+              <a:srgbClr val="D1D5DB"/>
+            </a:solidFill>
+          </a:ln>
+          <a:effectLst/>
+        </p:spPr>
+        <p:style>
+          <a:lnRef idx="1">
+            <a:schemeClr val="accent1"/>
+          </a:lnRef>
+          <a:fillRef idx="3">
+            <a:schemeClr val="accent1"/>
+          </a:fillRef>
+          <a:effectRef idx="2">
+            <a:schemeClr val="accent1"/>
+          </a:effectRef>
+          <a:fontRef idx="minor">
+            <a:schemeClr val="lt1"/>
+          </a:fontRef>
+        </p:style>
+        <p:txBody>
+          <a:bodyPr rtlCol="0" anchor="ctr" lIns="0" rIns="0" tIns="0" bIns="0"/>
+          <a:lstStyle/>
+          <a:p>
+            <a:pPr algn="ctr"/>
+          </a:p>
+        </p:txBody>
+      </p:sp>
+      <p:sp>
+        <p:nvSpPr>
+          <p:cNvPr id="85" name="TextBox 84"/>
+          <p:cNvSpPr txBox="1"/>
+          <p:nvPr/>
+        </p:nvSpPr>
+        <p:spPr>
+          <a:xfrm>
+            <a:off x="1078992" y="4553712"/>
+            <a:ext cx="2231136" cy="274320"/>
+          </a:xfrm>
+          <a:prstGeom prst="rect">
+            <a:avLst/>
+          </a:prstGeom>
+          <a:noFill/>
+        </p:spPr>
+        <p:txBody>
+          <a:bodyPr wrap="square" lIns="0" rIns="0" tIns="0" bIns="0" anchor="t">
+            <a:spAutoFit/>
+          </a:bodyPr>
+          <a:lstStyle/>
+          <a:p>
+            <a:pPr algn="l"/>
+            <a:r>
+              <a:rPr sz="900" b="1" i="0">
+                <a:solidFill>
+                  <a:srgbClr val="1A1A1A"/>
+                </a:solidFill>
+                <a:latin typeface="맑은 고딕"/>
+              </a:rPr>
+              <a:t>일본 R&amp;D 허브 (EUV 우회 NIL)</a:t>
+            </a:r>
+          </a:p>
+        </p:txBody>
+      </p:sp>
+      <p:sp>
+        <p:nvSpPr>
+          <p:cNvPr id="86" name="Rectangle 85"/>
+          <p:cNvSpPr/>
+          <p:nvPr/>
+        </p:nvSpPr>
+        <p:spPr>
+          <a:xfrm>
+            <a:off x="3383280" y="4462272"/>
+            <a:ext cx="4023360" cy="393192"/>
+          </a:xfrm>
+          <a:prstGeom prst="rect">
+            <a:avLst/>
+          </a:prstGeom>
+          <a:solidFill>
+            <a:srgbClr val="E8EEFC"/>
+          </a:solidFill>
+          <a:ln>
+            <a:solidFill>
+              <a:srgbClr val="D1D5DB"/>
+            </a:solidFill>
+          </a:ln>
+          <a:effectLst/>
+        </p:spPr>
+        <p:style>
+          <a:lnRef idx="1">
+            <a:schemeClr val="accent1"/>
+          </a:lnRef>
+          <a:fillRef idx="3">
+            <a:schemeClr val="accent1"/>
+          </a:fillRef>
+          <a:effectRef idx="2">
+            <a:schemeClr val="accent1"/>
+          </a:effectRef>
+          <a:fontRef idx="minor">
+            <a:schemeClr val="lt1"/>
+          </a:fontRef>
+        </p:style>
+        <p:txBody>
+          <a:bodyPr rtlCol="0" anchor="ctr" lIns="0" rIns="0" tIns="0" bIns="0"/>
+          <a:lstStyle/>
+          <a:p>
+            <a:pPr algn="ctr"/>
+          </a:p>
+        </p:txBody>
+      </p:sp>
+      <p:sp>
+        <p:nvSpPr>
+          <p:cNvPr id="87" name="TextBox 86"/>
+          <p:cNvSpPr txBox="1"/>
+          <p:nvPr/>
+        </p:nvSpPr>
+        <p:spPr>
+          <a:xfrm>
+            <a:off x="3474720" y="4553712"/>
+            <a:ext cx="3840480" cy="274320"/>
+          </a:xfrm>
+          <a:prstGeom prst="rect">
+            <a:avLst/>
+          </a:prstGeom>
+          <a:noFill/>
+        </p:spPr>
+        <p:txBody>
+          <a:bodyPr wrap="square" lIns="0" rIns="0" tIns="0" bIns="0" anchor="t">
+            <a:spAutoFit/>
+          </a:bodyPr>
+          <a:lstStyle/>
+          <a:p>
+            <a:pPr algn="l"/>
+            <a:r>
+              <a:rPr sz="850" b="0" i="0">
+                <a:solidFill>
+                  <a:srgbClr val="1A1A1A"/>
+                </a:solidFill>
+                <a:latin typeface="맑은 고딕"/>
+              </a:rPr>
+              <a:t>Canon NIL 양산 채택 사례 부재, R&amp;D 단계 베팅</a:t>
+            </a:r>
+          </a:p>
+        </p:txBody>
+      </p:sp>
+      <p:sp>
+        <p:nvSpPr>
+          <p:cNvPr id="88" name="Rectangle 87"/>
+          <p:cNvSpPr/>
+          <p:nvPr/>
+        </p:nvSpPr>
+        <p:spPr>
+          <a:xfrm>
+            <a:off x="7406640" y="4462272"/>
+            <a:ext cx="3291840" cy="393192"/>
+          </a:xfrm>
+          <a:prstGeom prst="rect">
+            <a:avLst/>
+          </a:prstGeom>
+          <a:solidFill>
+            <a:srgbClr val="E8EEFC"/>
+          </a:solidFill>
+          <a:ln>
+            <a:solidFill>
+              <a:srgbClr val="D1D5DB"/>
+            </a:solidFill>
+          </a:ln>
+          <a:effectLst/>
+        </p:spPr>
+        <p:style>
+          <a:lnRef idx="1">
+            <a:schemeClr val="accent1"/>
+          </a:lnRef>
+          <a:fillRef idx="3">
+            <a:schemeClr val="accent1"/>
+          </a:fillRef>
+          <a:effectRef idx="2">
+            <a:schemeClr val="accent1"/>
+          </a:effectRef>
+          <a:fontRef idx="minor">
+            <a:schemeClr val="lt1"/>
+          </a:fontRef>
+        </p:style>
+        <p:txBody>
+          <a:bodyPr rtlCol="0" anchor="ctr" lIns="0" rIns="0" tIns="0" bIns="0"/>
+          <a:lstStyle/>
+          <a:p>
+            <a:pPr algn="ctr"/>
+          </a:p>
+        </p:txBody>
+      </p:sp>
+      <p:sp>
+        <p:nvSpPr>
+          <p:cNvPr id="89" name="TextBox 88"/>
+          <p:cNvSpPr txBox="1"/>
+          <p:nvPr/>
+        </p:nvSpPr>
+        <p:spPr>
+          <a:xfrm>
+            <a:off x="7498080" y="4553712"/>
+            <a:ext cx="3108960" cy="274320"/>
+          </a:xfrm>
+          <a:prstGeom prst="rect">
+            <a:avLst/>
+          </a:prstGeom>
+          <a:noFill/>
+        </p:spPr>
+        <p:txBody>
+          <a:bodyPr wrap="square" lIns="0" rIns="0" tIns="0" bIns="0" anchor="t">
+            <a:spAutoFit/>
+          </a:bodyPr>
+          <a:lstStyle/>
+          <a:p>
+            <a:pPr algn="l"/>
+            <a:r>
+              <a:rPr sz="850" b="0" i="0">
+                <a:solidFill>
+                  <a:srgbClr val="1A1A1A"/>
+                </a:solidFill>
+                <a:latin typeface="맑은 고딕"/>
+              </a:rPr>
+              <a:t>2027 NIL 공동 개발 1차 결과</a:t>
+            </a:r>
+          </a:p>
+        </p:txBody>
+      </p:sp>
+      <p:sp>
+        <p:nvSpPr>
+          <p:cNvPr id="90" name="Rectangle 89"/>
+          <p:cNvSpPr/>
+          <p:nvPr/>
+        </p:nvSpPr>
+        <p:spPr>
+          <a:xfrm>
+            <a:off x="10698480" y="4462272"/>
+            <a:ext cx="1097280" cy="393192"/>
+          </a:xfrm>
+          <a:prstGeom prst="rect">
+            <a:avLst/>
+          </a:prstGeom>
+          <a:solidFill>
+            <a:srgbClr val="E8EEFC"/>
+          </a:solidFill>
+          <a:ln>
+            <a:solidFill>
+              <a:srgbClr val="D1D5DB"/>
+            </a:solidFill>
+          </a:ln>
+          <a:effectLst/>
+        </p:spPr>
+        <p:style>
+          <a:lnRef idx="1">
+            <a:schemeClr val="accent1"/>
+          </a:lnRef>
+          <a:fillRef idx="3">
+            <a:schemeClr val="accent1"/>
+          </a:fillRef>
+          <a:effectRef idx="2">
+            <a:schemeClr val="accent1"/>
+          </a:effectRef>
+          <a:fontRef idx="minor">
+            <a:schemeClr val="lt1"/>
+          </a:fontRef>
+        </p:style>
+        <p:txBody>
+          <a:bodyPr rtlCol="0" anchor="ctr" lIns="0" rIns="0" tIns="0" bIns="0"/>
+          <a:lstStyle/>
+          <a:p>
+            <a:pPr algn="ctr"/>
+          </a:p>
+        </p:txBody>
+      </p:sp>
+      <p:sp>
+        <p:nvSpPr>
+          <p:cNvPr id="91" name="TextBox 90"/>
+          <p:cNvSpPr txBox="1"/>
+          <p:nvPr/>
+        </p:nvSpPr>
+        <p:spPr>
+          <a:xfrm>
+            <a:off x="10698480" y="4553712"/>
+            <a:ext cx="1097280" cy="274320"/>
+          </a:xfrm>
+          <a:prstGeom prst="rect">
+            <a:avLst/>
+          </a:prstGeom>
+          <a:noFill/>
+        </p:spPr>
+        <p:txBody>
+          <a:bodyPr wrap="square" lIns="0" rIns="0" tIns="0" bIns="0" anchor="t">
+            <a:spAutoFit/>
+          </a:bodyPr>
+          <a:lstStyle/>
+          <a:p>
+            <a:pPr algn="ctr"/>
+            <a:r>
+              <a:rPr sz="1000" b="1" i="0">
+                <a:solidFill>
+                  <a:srgbClr val="1428A0"/>
+                </a:solidFill>
+                <a:latin typeface="Calibri"/>
+              </a:rPr>
+              <a:t>⚠️</a:t>
+            </a:r>
+          </a:p>
+        </p:txBody>
+      </p:sp>
+      <p:sp>
+        <p:nvSpPr>
+          <p:cNvPr id="92" name="Rectangle 91"/>
+          <p:cNvSpPr/>
+          <p:nvPr/>
+        </p:nvSpPr>
+        <p:spPr>
+          <a:xfrm>
+            <a:off x="365760" y="4855464"/>
+            <a:ext cx="640080" cy="393192"/>
+          </a:xfrm>
+          <a:prstGeom prst="rect">
+            <a:avLst/>
+          </a:prstGeom>
+          <a:solidFill>
+            <a:srgbClr val="E8EEFC"/>
+          </a:solidFill>
+          <a:ln>
+            <a:solidFill>
+              <a:srgbClr val="D1D5DB"/>
+            </a:solidFill>
+          </a:ln>
+          <a:effectLst/>
+        </p:spPr>
+        <p:style>
+          <a:lnRef idx="1">
+            <a:schemeClr val="accent1"/>
+          </a:lnRef>
+          <a:fillRef idx="3">
+            <a:schemeClr val="accent1"/>
+          </a:fillRef>
+          <a:effectRef idx="2">
+            <a:schemeClr val="accent1"/>
+          </a:effectRef>
+          <a:fontRef idx="minor">
+            <a:schemeClr val="lt1"/>
+          </a:fontRef>
+        </p:style>
+        <p:txBody>
+          <a:bodyPr rtlCol="0" anchor="ctr" lIns="0" rIns="0" tIns="0" bIns="0"/>
+          <a:lstStyle/>
+          <a:p>
+            <a:pPr algn="ctr"/>
+          </a:p>
+        </p:txBody>
+      </p:sp>
+      <p:sp>
+        <p:nvSpPr>
+          <p:cNvPr id="93" name="Rectangle 92"/>
+          <p:cNvSpPr/>
+          <p:nvPr/>
+        </p:nvSpPr>
+        <p:spPr>
+          <a:xfrm>
+            <a:off x="365760" y="4855464"/>
+            <a:ext cx="54864" cy="393192"/>
+          </a:xfrm>
+          <a:prstGeom prst="rect">
+            <a:avLst/>
+          </a:prstGeom>
+          <a:solidFill>
+            <a:srgbClr val="D97706"/>
+          </a:solidFill>
+          <a:ln>
+            <a:noFill/>
+          </a:ln>
+          <a:effectLst/>
+        </p:spPr>
+        <p:style>
+          <a:lnRef idx="1">
+            <a:schemeClr val="accent1"/>
+          </a:lnRef>
+          <a:fillRef idx="3">
+            <a:schemeClr val="accent1"/>
+          </a:fillRef>
+          <a:effectRef idx="2">
+            <a:schemeClr val="accent1"/>
+          </a:effectRef>
+          <a:fontRef idx="minor">
+            <a:schemeClr val="lt1"/>
+          </a:fontRef>
+        </p:style>
+        <p:txBody>
+          <a:bodyPr rtlCol="0" anchor="ctr" lIns="0" rIns="0" tIns="0" bIns="0"/>
+          <a:lstStyle/>
+          <a:p>
+            <a:pPr algn="ctr"/>
+          </a:p>
+        </p:txBody>
+      </p:sp>
+      <p:sp>
+        <p:nvSpPr>
+          <p:cNvPr id="94" name="TextBox 93"/>
+          <p:cNvSpPr txBox="1"/>
+          <p:nvPr/>
+        </p:nvSpPr>
+        <p:spPr>
+          <a:xfrm>
+            <a:off x="438912" y="4928616"/>
+            <a:ext cx="530352" cy="274320"/>
+          </a:xfrm>
+          <a:prstGeom prst="rect">
+            <a:avLst/>
+          </a:prstGeom>
+          <a:noFill/>
+        </p:spPr>
+        <p:txBody>
+          <a:bodyPr wrap="square" lIns="0" rIns="0" tIns="0" bIns="0" anchor="t">
+            <a:spAutoFit/>
+          </a:bodyPr>
+          <a:lstStyle/>
+          <a:p>
+            <a:pPr algn="ctr"/>
+            <a:r>
+              <a:rPr sz="950" b="1" i="0">
+                <a:solidFill>
+                  <a:srgbClr val="D97706"/>
+                </a:solidFill>
+                <a:latin typeface="Calibri"/>
+              </a:rPr>
+              <a:t>SD-2</a:t>
+            </a:r>
+          </a:p>
+        </p:txBody>
+      </p:sp>
+      <p:sp>
+        <p:nvSpPr>
+          <p:cNvPr id="95" name="Rectangle 94"/>
+          <p:cNvSpPr/>
+          <p:nvPr/>
+        </p:nvSpPr>
+        <p:spPr>
+          <a:xfrm>
+            <a:off x="1005840" y="4855464"/>
+            <a:ext cx="2377440" cy="393192"/>
+          </a:xfrm>
+          <a:prstGeom prst="rect">
+            <a:avLst/>
+          </a:prstGeom>
+          <a:solidFill>
+            <a:srgbClr val="E8EEFC"/>
+          </a:solidFill>
+          <a:ln>
+            <a:solidFill>
+              <a:srgbClr val="D1D5DB"/>
+            </a:solidFill>
+          </a:ln>
+          <a:effectLst/>
+        </p:spPr>
+        <p:style>
+          <a:lnRef idx="1">
+            <a:schemeClr val="accent1"/>
+          </a:lnRef>
+          <a:fillRef idx="3">
+            <a:schemeClr val="accent1"/>
+          </a:fillRef>
+          <a:effectRef idx="2">
+            <a:schemeClr val="accent1"/>
+          </a:effectRef>
+          <a:fontRef idx="minor">
+            <a:schemeClr val="lt1"/>
+          </a:fontRef>
+        </p:style>
+        <p:txBody>
+          <a:bodyPr rtlCol="0" anchor="ctr" lIns="0" rIns="0" tIns="0" bIns="0"/>
+          <a:lstStyle/>
+          <a:p>
+            <a:pPr algn="ctr"/>
+          </a:p>
+        </p:txBody>
+      </p:sp>
+      <p:sp>
+        <p:nvSpPr>
+          <p:cNvPr id="96" name="TextBox 95"/>
+          <p:cNvSpPr txBox="1"/>
+          <p:nvPr/>
+        </p:nvSpPr>
+        <p:spPr>
+          <a:xfrm>
+            <a:off x="1078992" y="4946904"/>
+            <a:ext cx="2231136" cy="274320"/>
+          </a:xfrm>
+          <a:prstGeom prst="rect">
+            <a:avLst/>
+          </a:prstGeom>
+          <a:noFill/>
+        </p:spPr>
+        <p:txBody>
+          <a:bodyPr wrap="square" lIns="0" rIns="0" tIns="0" bIns="0" anchor="t">
+            <a:spAutoFit/>
+          </a:bodyPr>
+          <a:lstStyle/>
+          <a:p>
+            <a:pPr algn="l"/>
+            <a:r>
+              <a:rPr sz="900" b="1" i="0">
+                <a:solidFill>
+                  <a:srgbClr val="1A1A1A"/>
+                </a:solidFill>
+                <a:latin typeface="맑은 고딕"/>
+              </a:rPr>
+              <a:t>산업용 AI 메모리 (자동차·의료)</a:t>
+            </a:r>
+          </a:p>
+        </p:txBody>
+      </p:sp>
+      <p:sp>
+        <p:nvSpPr>
+          <p:cNvPr id="97" name="Rectangle 96"/>
+          <p:cNvSpPr/>
+          <p:nvPr/>
+        </p:nvSpPr>
+        <p:spPr>
+          <a:xfrm>
+            <a:off x="3383280" y="4855464"/>
+            <a:ext cx="4023360" cy="393192"/>
+          </a:xfrm>
+          <a:prstGeom prst="rect">
+            <a:avLst/>
+          </a:prstGeom>
+          <a:solidFill>
+            <a:srgbClr val="E8EEFC"/>
+          </a:solidFill>
+          <a:ln>
+            <a:solidFill>
+              <a:srgbClr val="D1D5DB"/>
+            </a:solidFill>
+          </a:ln>
+          <a:effectLst/>
+        </p:spPr>
+        <p:style>
+          <a:lnRef idx="1">
+            <a:schemeClr val="accent1"/>
+          </a:lnRef>
+          <a:fillRef idx="3">
+            <a:schemeClr val="accent1"/>
+          </a:fillRef>
+          <a:effectRef idx="2">
+            <a:schemeClr val="accent1"/>
+          </a:effectRef>
+          <a:fontRef idx="minor">
+            <a:schemeClr val="lt1"/>
+          </a:fontRef>
+        </p:style>
+        <p:txBody>
+          <a:bodyPr rtlCol="0" anchor="ctr" lIns="0" rIns="0" tIns="0" bIns="0"/>
+          <a:lstStyle/>
+          <a:p>
+            <a:pPr algn="ctr"/>
+          </a:p>
+        </p:txBody>
+      </p:sp>
+      <p:sp>
+        <p:nvSpPr>
+          <p:cNvPr id="98" name="TextBox 97"/>
+          <p:cNvSpPr txBox="1"/>
+          <p:nvPr/>
+        </p:nvSpPr>
+        <p:spPr>
+          <a:xfrm>
+            <a:off x="3474720" y="4946904"/>
+            <a:ext cx="3840480" cy="274320"/>
+          </a:xfrm>
+          <a:prstGeom prst="rect">
+            <a:avLst/>
+          </a:prstGeom>
+          <a:noFill/>
+        </p:spPr>
+        <p:txBody>
+          <a:bodyPr wrap="square" lIns="0" rIns="0" tIns="0" bIns="0" anchor="t">
+            <a:spAutoFit/>
+          </a:bodyPr>
+          <a:lstStyle/>
+          <a:p>
+            <a:pPr algn="l"/>
+            <a:r>
+              <a:rPr sz="850" b="0" i="0">
+                <a:solidFill>
+                  <a:srgbClr val="1A1A1A"/>
+                </a:solidFill>
+                <a:latin typeface="맑은 고딕"/>
+              </a:rPr>
+              <a:t>Tesla 다년 계약 ✅, AEC-Q100 양산 미공개, Micron에 후행</a:t>
+            </a:r>
+          </a:p>
+        </p:txBody>
+      </p:sp>
+      <p:sp>
+        <p:nvSpPr>
+          <p:cNvPr id="99" name="Rectangle 98"/>
+          <p:cNvSpPr/>
+          <p:nvPr/>
+        </p:nvSpPr>
+        <p:spPr>
+          <a:xfrm>
+            <a:off x="7406640" y="4855464"/>
+            <a:ext cx="3291840" cy="393192"/>
+          </a:xfrm>
+          <a:prstGeom prst="rect">
+            <a:avLst/>
+          </a:prstGeom>
+          <a:solidFill>
+            <a:srgbClr val="E8EEFC"/>
+          </a:solidFill>
+          <a:ln>
+            <a:solidFill>
+              <a:srgbClr val="D1D5DB"/>
+            </a:solidFill>
+          </a:ln>
+          <a:effectLst/>
+        </p:spPr>
+        <p:style>
+          <a:lnRef idx="1">
+            <a:schemeClr val="accent1"/>
+          </a:lnRef>
+          <a:fillRef idx="3">
+            <a:schemeClr val="accent1"/>
+          </a:fillRef>
+          <a:effectRef idx="2">
+            <a:schemeClr val="accent1"/>
+          </a:effectRef>
+          <a:fontRef idx="minor">
+            <a:schemeClr val="lt1"/>
+          </a:fontRef>
+        </p:style>
+        <p:txBody>
+          <a:bodyPr rtlCol="0" anchor="ctr" lIns="0" rIns="0" tIns="0" bIns="0"/>
+          <a:lstStyle/>
+          <a:p>
+            <a:pPr algn="ctr"/>
+          </a:p>
+        </p:txBody>
+      </p:sp>
+      <p:sp>
+        <p:nvSpPr>
+          <p:cNvPr id="100" name="TextBox 99"/>
+          <p:cNvSpPr txBox="1"/>
+          <p:nvPr/>
+        </p:nvSpPr>
+        <p:spPr>
+          <a:xfrm>
+            <a:off x="7498080" y="4946904"/>
+            <a:ext cx="3108960" cy="274320"/>
+          </a:xfrm>
+          <a:prstGeom prst="rect">
+            <a:avLst/>
+          </a:prstGeom>
+          <a:noFill/>
+        </p:spPr>
+        <p:txBody>
+          <a:bodyPr wrap="square" lIns="0" rIns="0" tIns="0" bIns="0" anchor="t">
+            <a:spAutoFit/>
+          </a:bodyPr>
+          <a:lstStyle/>
+          <a:p>
+            <a:pPr algn="l"/>
+            <a:r>
+              <a:rPr sz="850" b="0" i="0">
+                <a:solidFill>
+                  <a:srgbClr val="1A1A1A"/>
+                </a:solidFill>
+                <a:latin typeface="맑은 고딕"/>
+              </a:rPr>
+              <a:t>2026~2028 AEC-Q100 인증 사이클</a:t>
+            </a:r>
+          </a:p>
+        </p:txBody>
+      </p:sp>
+      <p:sp>
+        <p:nvSpPr>
+          <p:cNvPr id="101" name="Rectangle 100"/>
+          <p:cNvSpPr/>
+          <p:nvPr/>
+        </p:nvSpPr>
+        <p:spPr>
+          <a:xfrm>
+            <a:off x="10698480" y="4855464"/>
+            <a:ext cx="1097280" cy="393192"/>
+          </a:xfrm>
+          <a:prstGeom prst="rect">
+            <a:avLst/>
+          </a:prstGeom>
+          <a:solidFill>
+            <a:srgbClr val="E8EEFC"/>
+          </a:solidFill>
+          <a:ln>
+            <a:solidFill>
+              <a:srgbClr val="D1D5DB"/>
+            </a:solidFill>
+          </a:ln>
+          <a:effectLst/>
+        </p:spPr>
+        <p:style>
+          <a:lnRef idx="1">
+            <a:schemeClr val="accent1"/>
+          </a:lnRef>
+          <a:fillRef idx="3">
+            <a:schemeClr val="accent1"/>
+          </a:fillRef>
+          <a:effectRef idx="2">
+            <a:schemeClr val="accent1"/>
+          </a:effectRef>
+          <a:fontRef idx="minor">
+            <a:schemeClr val="lt1"/>
+          </a:fontRef>
+        </p:style>
+        <p:txBody>
+          <a:bodyPr rtlCol="0" anchor="ctr" lIns="0" rIns="0" tIns="0" bIns="0"/>
+          <a:lstStyle/>
+          <a:p>
+            <a:pPr algn="ctr"/>
+          </a:p>
+        </p:txBody>
+      </p:sp>
+      <p:sp>
+        <p:nvSpPr>
+          <p:cNvPr id="102" name="TextBox 101"/>
+          <p:cNvSpPr txBox="1"/>
+          <p:nvPr/>
+        </p:nvSpPr>
+        <p:spPr>
+          <a:xfrm>
+            <a:off x="10698480" y="4946904"/>
+            <a:ext cx="1097280" cy="274320"/>
+          </a:xfrm>
+          <a:prstGeom prst="rect">
+            <a:avLst/>
+          </a:prstGeom>
+          <a:noFill/>
+        </p:spPr>
+        <p:txBody>
+          <a:bodyPr wrap="square" lIns="0" rIns="0" tIns="0" bIns="0" anchor="t">
+            <a:spAutoFit/>
+          </a:bodyPr>
+          <a:lstStyle/>
+          <a:p>
+            <a:pPr algn="ctr"/>
+            <a:r>
+              <a:rPr sz="1000" b="1" i="0">
+                <a:solidFill>
+                  <a:srgbClr val="1428A0"/>
+                </a:solidFill>
+                <a:latin typeface="Calibri"/>
+              </a:rPr>
+              <a:t>🔵 / ⚠️</a:t>
+            </a:r>
+          </a:p>
+        </p:txBody>
+      </p:sp>
+      <p:sp>
+        <p:nvSpPr>
+          <p:cNvPr id="103" name="Rectangle 102"/>
+          <p:cNvSpPr/>
+          <p:nvPr/>
+        </p:nvSpPr>
+        <p:spPr>
+          <a:xfrm>
+            <a:off x="365760" y="5248656"/>
+            <a:ext cx="640080" cy="393192"/>
+          </a:xfrm>
+          <a:prstGeom prst="rect">
+            <a:avLst/>
+          </a:prstGeom>
+          <a:solidFill>
+            <a:srgbClr val="E8EEFC"/>
+          </a:solidFill>
+          <a:ln>
+            <a:solidFill>
+              <a:srgbClr val="D1D5DB"/>
+            </a:solidFill>
+          </a:ln>
+          <a:effectLst/>
+        </p:spPr>
+        <p:style>
+          <a:lnRef idx="1">
+            <a:schemeClr val="accent1"/>
+          </a:lnRef>
+          <a:fillRef idx="3">
+            <a:schemeClr val="accent1"/>
+          </a:fillRef>
+          <a:effectRef idx="2">
+            <a:schemeClr val="accent1"/>
+          </a:effectRef>
+          <a:fontRef idx="minor">
+            <a:schemeClr val="lt1"/>
+          </a:fontRef>
+        </p:style>
+        <p:txBody>
+          <a:bodyPr rtlCol="0" anchor="ctr" lIns="0" rIns="0" tIns="0" bIns="0"/>
+          <a:lstStyle/>
+          <a:p>
+            <a:pPr algn="ctr"/>
+          </a:p>
+        </p:txBody>
+      </p:sp>
+      <p:sp>
+        <p:nvSpPr>
+          <p:cNvPr id="104" name="Rectangle 103"/>
+          <p:cNvSpPr/>
+          <p:nvPr/>
+        </p:nvSpPr>
+        <p:spPr>
+          <a:xfrm>
+            <a:off x="365760" y="5248656"/>
+            <a:ext cx="54864" cy="393192"/>
+          </a:xfrm>
+          <a:prstGeom prst="rect">
+            <a:avLst/>
+          </a:prstGeom>
+          <a:solidFill>
+            <a:srgbClr val="D97706"/>
+          </a:solidFill>
+          <a:ln>
+            <a:noFill/>
+          </a:ln>
+          <a:effectLst/>
+        </p:spPr>
+        <p:style>
+          <a:lnRef idx="1">
+            <a:schemeClr val="accent1"/>
+          </a:lnRef>
+          <a:fillRef idx="3">
+            <a:schemeClr val="accent1"/>
+          </a:fillRef>
+          <a:effectRef idx="2">
+            <a:schemeClr val="accent1"/>
+          </a:effectRef>
+          <a:fontRef idx="minor">
+            <a:schemeClr val="lt1"/>
+          </a:fontRef>
+        </p:style>
+        <p:txBody>
+          <a:bodyPr rtlCol="0" anchor="ctr" lIns="0" rIns="0" tIns="0" bIns="0"/>
+          <a:lstStyle/>
+          <a:p>
+            <a:pPr algn="ctr"/>
+          </a:p>
+        </p:txBody>
+      </p:sp>
+      <p:sp>
+        <p:nvSpPr>
+          <p:cNvPr id="105" name="TextBox 104"/>
+          <p:cNvSpPr txBox="1"/>
+          <p:nvPr/>
+        </p:nvSpPr>
+        <p:spPr>
+          <a:xfrm>
+            <a:off x="438912" y="5321808"/>
+            <a:ext cx="530352" cy="274320"/>
+          </a:xfrm>
+          <a:prstGeom prst="rect">
+            <a:avLst/>
+          </a:prstGeom>
+          <a:noFill/>
+        </p:spPr>
+        <p:txBody>
+          <a:bodyPr wrap="square" lIns="0" rIns="0" tIns="0" bIns="0" anchor="t">
+            <a:spAutoFit/>
+          </a:bodyPr>
+          <a:lstStyle/>
+          <a:p>
+            <a:pPr algn="ctr"/>
+            <a:r>
+              <a:rPr sz="950" b="1" i="0">
+                <a:solidFill>
+                  <a:srgbClr val="D97706"/>
+                </a:solidFill>
+                <a:latin typeface="Calibri"/>
+              </a:rPr>
+              <a:t>SE-1</a:t>
+            </a:r>
+          </a:p>
+        </p:txBody>
+      </p:sp>
+      <p:sp>
+        <p:nvSpPr>
+          <p:cNvPr id="106" name="Rectangle 105"/>
+          <p:cNvSpPr/>
+          <p:nvPr/>
+        </p:nvSpPr>
+        <p:spPr>
+          <a:xfrm>
+            <a:off x="1005840" y="5248656"/>
+            <a:ext cx="2377440" cy="393192"/>
+          </a:xfrm>
+          <a:prstGeom prst="rect">
+            <a:avLst/>
+          </a:prstGeom>
+          <a:solidFill>
+            <a:srgbClr val="E8EEFC"/>
+          </a:solidFill>
+          <a:ln>
+            <a:solidFill>
+              <a:srgbClr val="D1D5DB"/>
+            </a:solidFill>
+          </a:ln>
+          <a:effectLst/>
+        </p:spPr>
+        <p:style>
+          <a:lnRef idx="1">
+            <a:schemeClr val="accent1"/>
+          </a:lnRef>
+          <a:fillRef idx="3">
+            <a:schemeClr val="accent1"/>
+          </a:fillRef>
+          <a:effectRef idx="2">
+            <a:schemeClr val="accent1"/>
+          </a:effectRef>
+          <a:fontRef idx="minor">
+            <a:schemeClr val="lt1"/>
+          </a:fontRef>
+        </p:style>
+        <p:txBody>
+          <a:bodyPr rtlCol="0" anchor="ctr" lIns="0" rIns="0" tIns="0" bIns="0"/>
+          <a:lstStyle/>
+          <a:p>
+            <a:pPr algn="ctr"/>
+          </a:p>
+        </p:txBody>
+      </p:sp>
+      <p:sp>
+        <p:nvSpPr>
+          <p:cNvPr id="107" name="TextBox 106"/>
+          <p:cNvSpPr txBox="1"/>
+          <p:nvPr/>
+        </p:nvSpPr>
+        <p:spPr>
+          <a:xfrm>
+            <a:off x="1078992" y="5340096"/>
+            <a:ext cx="2231136" cy="274320"/>
+          </a:xfrm>
+          <a:prstGeom prst="rect">
+            <a:avLst/>
+          </a:prstGeom>
+          <a:noFill/>
+        </p:spPr>
+        <p:txBody>
+          <a:bodyPr wrap="square" lIns="0" rIns="0" tIns="0" bIns="0" anchor="t">
+            <a:spAutoFit/>
+          </a:bodyPr>
+          <a:lstStyle/>
+          <a:p>
+            <a:pPr algn="l"/>
+            <a:r>
+              <a:rPr sz="900" b="1" i="0">
+                <a:solidFill>
+                  <a:srgbClr val="1A1A1A"/>
+                </a:solidFill>
+                <a:latin typeface="맑은 고딕"/>
+              </a:rPr>
+              <a:t>3D DRAM + IMEC + M&amp;A</a:t>
+            </a:r>
+          </a:p>
+        </p:txBody>
+      </p:sp>
+      <p:sp>
+        <p:nvSpPr>
+          <p:cNvPr id="108" name="Rectangle 107"/>
+          <p:cNvSpPr/>
+          <p:nvPr/>
+        </p:nvSpPr>
+        <p:spPr>
+          <a:xfrm>
+            <a:off x="3383280" y="5248656"/>
+            <a:ext cx="4023360" cy="393192"/>
+          </a:xfrm>
+          <a:prstGeom prst="rect">
+            <a:avLst/>
+          </a:prstGeom>
+          <a:solidFill>
+            <a:srgbClr val="E8EEFC"/>
+          </a:solidFill>
+          <a:ln>
+            <a:solidFill>
+              <a:srgbClr val="D1D5DB"/>
+            </a:solidFill>
+          </a:ln>
+          <a:effectLst/>
+        </p:spPr>
+        <p:style>
+          <a:lnRef idx="1">
+            <a:schemeClr val="accent1"/>
+          </a:lnRef>
+          <a:fillRef idx="3">
+            <a:schemeClr val="accent1"/>
+          </a:fillRef>
+          <a:effectRef idx="2">
+            <a:schemeClr val="accent1"/>
+          </a:effectRef>
+          <a:fontRef idx="minor">
+            <a:schemeClr val="lt1"/>
+          </a:fontRef>
+        </p:style>
+        <p:txBody>
+          <a:bodyPr rtlCol="0" anchor="ctr" lIns="0" rIns="0" tIns="0" bIns="0"/>
+          <a:lstStyle/>
+          <a:p>
+            <a:pPr algn="ctr"/>
+          </a:p>
+        </p:txBody>
+      </p:sp>
+      <p:sp>
+        <p:nvSpPr>
+          <p:cNvPr id="109" name="TextBox 108"/>
+          <p:cNvSpPr txBox="1"/>
+          <p:nvPr/>
+        </p:nvSpPr>
+        <p:spPr>
+          <a:xfrm>
+            <a:off x="3474720" y="5340096"/>
+            <a:ext cx="3840480" cy="274320"/>
+          </a:xfrm>
+          <a:prstGeom prst="rect">
+            <a:avLst/>
+          </a:prstGeom>
+          <a:noFill/>
+        </p:spPr>
+        <p:txBody>
+          <a:bodyPr wrap="square" lIns="0" rIns="0" tIns="0" bIns="0" anchor="t">
+            <a:spAutoFit/>
+          </a:bodyPr>
+          <a:lstStyle/>
+          <a:p>
+            <a:pPr algn="l"/>
+            <a:r>
+              <a:rPr sz="850" b="0" i="0">
+                <a:solidFill>
+                  <a:srgbClr val="1A1A1A"/>
+                </a:solidFill>
+                <a:latin typeface="맑은 고딕"/>
+              </a:rPr>
+              <a:t>SK 30년 로드맵 대비 후행, Samsung 전담 조직 미공개</a:t>
+            </a:r>
+          </a:p>
+        </p:txBody>
+      </p:sp>
+      <p:sp>
+        <p:nvSpPr>
+          <p:cNvPr id="110" name="Rectangle 109"/>
+          <p:cNvSpPr/>
+          <p:nvPr/>
+        </p:nvSpPr>
+        <p:spPr>
+          <a:xfrm>
+            <a:off x="7406640" y="5248656"/>
+            <a:ext cx="3291840" cy="393192"/>
+          </a:xfrm>
+          <a:prstGeom prst="rect">
+            <a:avLst/>
+          </a:prstGeom>
+          <a:solidFill>
+            <a:srgbClr val="E8EEFC"/>
+          </a:solidFill>
+          <a:ln>
+            <a:solidFill>
+              <a:srgbClr val="D1D5DB"/>
+            </a:solidFill>
+          </a:ln>
+          <a:effectLst/>
+        </p:spPr>
+        <p:style>
+          <a:lnRef idx="1">
+            <a:schemeClr val="accent1"/>
+          </a:lnRef>
+          <a:fillRef idx="3">
+            <a:schemeClr val="accent1"/>
+          </a:fillRef>
+          <a:effectRef idx="2">
+            <a:schemeClr val="accent1"/>
+          </a:effectRef>
+          <a:fontRef idx="minor">
+            <a:schemeClr val="lt1"/>
+          </a:fontRef>
+        </p:style>
+        <p:txBody>
+          <a:bodyPr rtlCol="0" anchor="ctr" lIns="0" rIns="0" tIns="0" bIns="0"/>
+          <a:lstStyle/>
+          <a:p>
+            <a:pPr algn="ctr"/>
+          </a:p>
+        </p:txBody>
+      </p:sp>
+      <p:sp>
+        <p:nvSpPr>
+          <p:cNvPr id="111" name="TextBox 110"/>
+          <p:cNvSpPr txBox="1"/>
+          <p:nvPr/>
+        </p:nvSpPr>
+        <p:spPr>
+          <a:xfrm>
+            <a:off x="7498080" y="5340096"/>
+            <a:ext cx="3108960" cy="274320"/>
+          </a:xfrm>
+          <a:prstGeom prst="rect">
+            <a:avLst/>
+          </a:prstGeom>
+          <a:noFill/>
+        </p:spPr>
+        <p:txBody>
+          <a:bodyPr wrap="square" lIns="0" rIns="0" tIns="0" bIns="0" anchor="t">
+            <a:spAutoFit/>
+          </a:bodyPr>
+          <a:lstStyle/>
+          <a:p>
+            <a:pPr algn="l"/>
+            <a:r>
+              <a:rPr sz="850" b="0" i="0">
+                <a:solidFill>
+                  <a:srgbClr val="1A1A1A"/>
+                </a:solidFill>
+                <a:latin typeface="맑은 고딕"/>
+              </a:rPr>
+              <a:t>2026~2027 전담 R&amp;D 조직 + IMEC 협약</a:t>
+            </a:r>
+          </a:p>
+        </p:txBody>
+      </p:sp>
+      <p:sp>
+        <p:nvSpPr>
+          <p:cNvPr id="112" name="Rectangle 111"/>
+          <p:cNvSpPr/>
+          <p:nvPr/>
+        </p:nvSpPr>
+        <p:spPr>
+          <a:xfrm>
+            <a:off x="10698480" y="5248656"/>
+            <a:ext cx="1097280" cy="393192"/>
+          </a:xfrm>
+          <a:prstGeom prst="rect">
+            <a:avLst/>
+          </a:prstGeom>
+          <a:solidFill>
+            <a:srgbClr val="E8EEFC"/>
+          </a:solidFill>
+          <a:ln>
+            <a:solidFill>
+              <a:srgbClr val="D1D5DB"/>
+            </a:solidFill>
+          </a:ln>
+          <a:effectLst/>
+        </p:spPr>
+        <p:style>
+          <a:lnRef idx="1">
+            <a:schemeClr val="accent1"/>
+          </a:lnRef>
+          <a:fillRef idx="3">
+            <a:schemeClr val="accent1"/>
+          </a:fillRef>
+          <a:effectRef idx="2">
+            <a:schemeClr val="accent1"/>
+          </a:effectRef>
+          <a:fontRef idx="minor">
+            <a:schemeClr val="lt1"/>
+          </a:fontRef>
+        </p:style>
+        <p:txBody>
+          <a:bodyPr rtlCol="0" anchor="ctr" lIns="0" rIns="0" tIns="0" bIns="0"/>
+          <a:lstStyle/>
+          <a:p>
+            <a:pPr algn="ctr"/>
+          </a:p>
+        </p:txBody>
+      </p:sp>
+      <p:sp>
+        <p:nvSpPr>
+          <p:cNvPr id="113" name="TextBox 112"/>
+          <p:cNvSpPr txBox="1"/>
+          <p:nvPr/>
+        </p:nvSpPr>
+        <p:spPr>
+          <a:xfrm>
+            <a:off x="10698480" y="5340096"/>
+            <a:ext cx="1097280" cy="274320"/>
+          </a:xfrm>
+          <a:prstGeom prst="rect">
+            <a:avLst/>
+          </a:prstGeom>
+          <a:noFill/>
+        </p:spPr>
+        <p:txBody>
+          <a:bodyPr wrap="square" lIns="0" rIns="0" tIns="0" bIns="0" anchor="t">
+            <a:spAutoFit/>
+          </a:bodyPr>
+          <a:lstStyle/>
+          <a:p>
+            <a:pPr algn="ctr"/>
+            <a:r>
+              <a:rPr sz="1000" b="1" i="0">
+                <a:solidFill>
+                  <a:srgbClr val="1428A0"/>
+                </a:solidFill>
+                <a:latin typeface="Calibri"/>
+              </a:rPr>
+              <a:t>⚠️</a:t>
+            </a:r>
+          </a:p>
+        </p:txBody>
+      </p:sp>
+      <p:sp>
+        <p:nvSpPr>
+          <p:cNvPr id="114" name="Rectangle 113"/>
+          <p:cNvSpPr/>
+          <p:nvPr/>
+        </p:nvSpPr>
+        <p:spPr>
+          <a:xfrm>
+            <a:off x="365760" y="5641848"/>
+            <a:ext cx="640080" cy="393192"/>
+          </a:xfrm>
+          <a:prstGeom prst="rect">
+            <a:avLst/>
+          </a:prstGeom>
+          <a:solidFill>
+            <a:srgbClr val="E8EEFC"/>
+          </a:solidFill>
+          <a:ln>
+            <a:solidFill>
+              <a:srgbClr val="D1D5DB"/>
+            </a:solidFill>
+          </a:ln>
+          <a:effectLst/>
+        </p:spPr>
+        <p:style>
+          <a:lnRef idx="1">
+            <a:schemeClr val="accent1"/>
+          </a:lnRef>
+          <a:fillRef idx="3">
+            <a:schemeClr val="accent1"/>
+          </a:fillRef>
+          <a:effectRef idx="2">
+            <a:schemeClr val="accent1"/>
+          </a:effectRef>
+          <a:fontRef idx="minor">
+            <a:schemeClr val="lt1"/>
+          </a:fontRef>
+        </p:style>
+        <p:txBody>
+          <a:bodyPr rtlCol="0" anchor="ctr" lIns="0" rIns="0" tIns="0" bIns="0"/>
+          <a:lstStyle/>
+          <a:p>
+            <a:pPr algn="ctr"/>
+          </a:p>
+        </p:txBody>
+      </p:sp>
+      <p:sp>
+        <p:nvSpPr>
+          <p:cNvPr id="115" name="Rectangle 114"/>
+          <p:cNvSpPr/>
+          <p:nvPr/>
+        </p:nvSpPr>
+        <p:spPr>
+          <a:xfrm>
+            <a:off x="365760" y="5641848"/>
+            <a:ext cx="54864" cy="393192"/>
+          </a:xfrm>
+          <a:prstGeom prst="rect">
+            <a:avLst/>
+          </a:prstGeom>
+          <a:solidFill>
+            <a:srgbClr val="D97706"/>
+          </a:solidFill>
+          <a:ln>
+            <a:noFill/>
+          </a:ln>
+          <a:effectLst/>
+        </p:spPr>
+        <p:style>
+          <a:lnRef idx="1">
+            <a:schemeClr val="accent1"/>
+          </a:lnRef>
+          <a:fillRef idx="3">
+            <a:schemeClr val="accent1"/>
+          </a:fillRef>
+          <a:effectRef idx="2">
+            <a:schemeClr val="accent1"/>
+          </a:effectRef>
+          <a:fontRef idx="minor">
+            <a:schemeClr val="lt1"/>
+          </a:fontRef>
+        </p:style>
+        <p:txBody>
+          <a:bodyPr rtlCol="0" anchor="ctr" lIns="0" rIns="0" tIns="0" bIns="0"/>
+          <a:lstStyle/>
+          <a:p>
+            <a:pPr algn="ctr"/>
+          </a:p>
+        </p:txBody>
+      </p:sp>
+      <p:sp>
+        <p:nvSpPr>
+          <p:cNvPr id="116" name="TextBox 115"/>
+          <p:cNvSpPr txBox="1"/>
+          <p:nvPr/>
+        </p:nvSpPr>
+        <p:spPr>
+          <a:xfrm>
+            <a:off x="438912" y="5715000"/>
+            <a:ext cx="530352" cy="274320"/>
+          </a:xfrm>
+          <a:prstGeom prst="rect">
+            <a:avLst/>
+          </a:prstGeom>
+          <a:noFill/>
+        </p:spPr>
+        <p:txBody>
+          <a:bodyPr wrap="square" lIns="0" rIns="0" tIns="0" bIns="0" anchor="t">
+            <a:spAutoFit/>
+          </a:bodyPr>
+          <a:lstStyle/>
+          <a:p>
+            <a:pPr algn="ctr"/>
+            <a:r>
+              <a:rPr sz="950" b="1" i="0">
+                <a:solidFill>
+                  <a:srgbClr val="D97706"/>
+                </a:solidFill>
+                <a:latin typeface="Calibri"/>
+              </a:rPr>
+              <a:t>SE-2</a:t>
+            </a:r>
+          </a:p>
+        </p:txBody>
+      </p:sp>
+      <p:sp>
+        <p:nvSpPr>
+          <p:cNvPr id="117" name="Rectangle 116"/>
+          <p:cNvSpPr/>
+          <p:nvPr/>
+        </p:nvSpPr>
+        <p:spPr>
+          <a:xfrm>
+            <a:off x="1005840" y="5641848"/>
+            <a:ext cx="2377440" cy="393192"/>
+          </a:xfrm>
+          <a:prstGeom prst="rect">
+            <a:avLst/>
+          </a:prstGeom>
+          <a:solidFill>
+            <a:srgbClr val="E8EEFC"/>
+          </a:solidFill>
+          <a:ln>
+            <a:solidFill>
+              <a:srgbClr val="D1D5DB"/>
+            </a:solidFill>
+          </a:ln>
+          <a:effectLst/>
+        </p:spPr>
+        <p:style>
+          <a:lnRef idx="1">
+            <a:schemeClr val="accent1"/>
+          </a:lnRef>
+          <a:fillRef idx="3">
+            <a:schemeClr val="accent1"/>
+          </a:fillRef>
+          <a:effectRef idx="2">
+            <a:schemeClr val="accent1"/>
+          </a:effectRef>
+          <a:fontRef idx="minor">
+            <a:schemeClr val="lt1"/>
+          </a:fontRef>
+        </p:style>
+        <p:txBody>
+          <a:bodyPr rtlCol="0" anchor="ctr" lIns="0" rIns="0" tIns="0" bIns="0"/>
+          <a:lstStyle/>
+          <a:p>
+            <a:pPr algn="ctr"/>
+          </a:p>
+        </p:txBody>
+      </p:sp>
+      <p:sp>
+        <p:nvSpPr>
+          <p:cNvPr id="118" name="TextBox 117"/>
+          <p:cNvSpPr txBox="1"/>
+          <p:nvPr/>
+        </p:nvSpPr>
+        <p:spPr>
+          <a:xfrm>
+            <a:off x="1078992" y="5733288"/>
+            <a:ext cx="2231136" cy="274320"/>
+          </a:xfrm>
+          <a:prstGeom prst="rect">
+            <a:avLst/>
+          </a:prstGeom>
+          <a:noFill/>
+        </p:spPr>
+        <p:txBody>
+          <a:bodyPr wrap="square" lIns="0" rIns="0" tIns="0" bIns="0" anchor="t">
+            <a:spAutoFit/>
+          </a:bodyPr>
+          <a:lstStyle/>
+          <a:p>
+            <a:pPr algn="l"/>
+            <a:r>
+              <a:rPr sz="900" b="1" i="0">
+                <a:solidFill>
+                  <a:srgbClr val="1A1A1A"/>
+                </a:solidFill>
+                <a:latin typeface="맑은 고딕"/>
+              </a:rPr>
+              <a:t>CXL SIG 표준 주도</a:t>
+            </a:r>
+          </a:p>
+        </p:txBody>
+      </p:sp>
+      <p:sp>
+        <p:nvSpPr>
+          <p:cNvPr id="119" name="Rectangle 118"/>
+          <p:cNvSpPr/>
+          <p:nvPr/>
+        </p:nvSpPr>
+        <p:spPr>
+          <a:xfrm>
+            <a:off x="3383280" y="5641848"/>
+            <a:ext cx="4023360" cy="393192"/>
+          </a:xfrm>
+          <a:prstGeom prst="rect">
+            <a:avLst/>
+          </a:prstGeom>
+          <a:solidFill>
+            <a:srgbClr val="E8EEFC"/>
+          </a:solidFill>
+          <a:ln>
+            <a:solidFill>
+              <a:srgbClr val="D1D5DB"/>
+            </a:solidFill>
+          </a:ln>
+          <a:effectLst/>
+        </p:spPr>
+        <p:style>
+          <a:lnRef idx="1">
+            <a:schemeClr val="accent1"/>
+          </a:lnRef>
+          <a:fillRef idx="3">
+            <a:schemeClr val="accent1"/>
+          </a:fillRef>
+          <a:effectRef idx="2">
+            <a:schemeClr val="accent1"/>
+          </a:effectRef>
+          <a:fontRef idx="minor">
+            <a:schemeClr val="lt1"/>
+          </a:fontRef>
+        </p:style>
+        <p:txBody>
+          <a:bodyPr rtlCol="0" anchor="ctr" lIns="0" rIns="0" tIns="0" bIns="0"/>
+          <a:lstStyle/>
+          <a:p>
+            <a:pPr algn="ctr"/>
+          </a:p>
+        </p:txBody>
+      </p:sp>
+      <p:sp>
+        <p:nvSpPr>
+          <p:cNvPr id="120" name="TextBox 119"/>
+          <p:cNvSpPr txBox="1"/>
+          <p:nvPr/>
+        </p:nvSpPr>
+        <p:spPr>
+          <a:xfrm>
+            <a:off x="3474720" y="5733288"/>
+            <a:ext cx="3840480" cy="274320"/>
+          </a:xfrm>
+          <a:prstGeom prst="rect">
+            <a:avLst/>
+          </a:prstGeom>
+          <a:noFill/>
+        </p:spPr>
+        <p:txBody>
+          <a:bodyPr wrap="square" lIns="0" rIns="0" tIns="0" bIns="0" anchor="t">
+            <a:spAutoFit/>
+          </a:bodyPr>
+          <a:lstStyle/>
+          <a:p>
+            <a:pPr algn="l"/>
+            <a:r>
+              <a:rPr sz="850" b="0" i="0">
+                <a:solidFill>
+                  <a:srgbClr val="1A1A1A"/>
+                </a:solidFill>
+                <a:latin typeface="맑은 고딕"/>
+              </a:rPr>
+              <a:t>CMM-D 첫 제품 ✅, Pangea v3 (CXL 3.2) 2026 발표 예정</a:t>
+            </a:r>
+          </a:p>
+        </p:txBody>
+      </p:sp>
+      <p:sp>
+        <p:nvSpPr>
+          <p:cNvPr id="121" name="Rectangle 120"/>
+          <p:cNvSpPr/>
+          <p:nvPr/>
+        </p:nvSpPr>
+        <p:spPr>
+          <a:xfrm>
+            <a:off x="7406640" y="5641848"/>
+            <a:ext cx="3291840" cy="393192"/>
+          </a:xfrm>
+          <a:prstGeom prst="rect">
+            <a:avLst/>
+          </a:prstGeom>
+          <a:solidFill>
+            <a:srgbClr val="E8EEFC"/>
+          </a:solidFill>
+          <a:ln>
+            <a:solidFill>
+              <a:srgbClr val="D1D5DB"/>
+            </a:solidFill>
+          </a:ln>
+          <a:effectLst/>
+        </p:spPr>
+        <p:style>
+          <a:lnRef idx="1">
+            <a:schemeClr val="accent1"/>
+          </a:lnRef>
+          <a:fillRef idx="3">
+            <a:schemeClr val="accent1"/>
+          </a:fillRef>
+          <a:effectRef idx="2">
+            <a:schemeClr val="accent1"/>
+          </a:effectRef>
+          <a:fontRef idx="minor">
+            <a:schemeClr val="lt1"/>
+          </a:fontRef>
+        </p:style>
+        <p:txBody>
+          <a:bodyPr rtlCol="0" anchor="ctr" lIns="0" rIns="0" tIns="0" bIns="0"/>
+          <a:lstStyle/>
+          <a:p>
+            <a:pPr algn="ctr"/>
+          </a:p>
+        </p:txBody>
+      </p:sp>
+      <p:sp>
+        <p:nvSpPr>
+          <p:cNvPr id="122" name="TextBox 121"/>
+          <p:cNvSpPr txBox="1"/>
+          <p:nvPr/>
+        </p:nvSpPr>
+        <p:spPr>
+          <a:xfrm>
+            <a:off x="7498080" y="5733288"/>
+            <a:ext cx="3108960" cy="274320"/>
+          </a:xfrm>
+          <a:prstGeom prst="rect">
+            <a:avLst/>
+          </a:prstGeom>
+          <a:noFill/>
+        </p:spPr>
+        <p:txBody>
+          <a:bodyPr wrap="square" lIns="0" rIns="0" tIns="0" bIns="0" anchor="t">
+            <a:spAutoFit/>
+          </a:bodyPr>
+          <a:lstStyle/>
+          <a:p>
+            <a:pPr algn="l"/>
+            <a:r>
+              <a:rPr sz="850" b="0" i="0">
+                <a:solidFill>
+                  <a:srgbClr val="1A1A1A"/>
+                </a:solidFill>
+                <a:latin typeface="맑은 고딕"/>
+              </a:rPr>
+              <a:t>2026 H1 Pangea v3 + 워킹그룹 인력 2배</a:t>
+            </a:r>
+          </a:p>
+        </p:txBody>
+      </p:sp>
+      <p:sp>
+        <p:nvSpPr>
+          <p:cNvPr id="123" name="Rectangle 122"/>
+          <p:cNvSpPr/>
+          <p:nvPr/>
+        </p:nvSpPr>
+        <p:spPr>
+          <a:xfrm>
+            <a:off x="10698480" y="5641848"/>
+            <a:ext cx="1097280" cy="393192"/>
+          </a:xfrm>
+          <a:prstGeom prst="rect">
+            <a:avLst/>
+          </a:prstGeom>
+          <a:solidFill>
+            <a:srgbClr val="E8EEFC"/>
+          </a:solidFill>
+          <a:ln>
+            <a:solidFill>
+              <a:srgbClr val="D1D5DB"/>
+            </a:solidFill>
+          </a:ln>
+          <a:effectLst/>
+        </p:spPr>
+        <p:style>
+          <a:lnRef idx="1">
+            <a:schemeClr val="accent1"/>
+          </a:lnRef>
+          <a:fillRef idx="3">
+            <a:schemeClr val="accent1"/>
+          </a:fillRef>
+          <a:effectRef idx="2">
+            <a:schemeClr val="accent1"/>
+          </a:effectRef>
+          <a:fontRef idx="minor">
+            <a:schemeClr val="lt1"/>
+          </a:fontRef>
+        </p:style>
+        <p:txBody>
+          <a:bodyPr rtlCol="0" anchor="ctr" lIns="0" rIns="0" tIns="0" bIns="0"/>
+          <a:lstStyle/>
+          <a:p>
+            <a:pPr algn="ctr"/>
+          </a:p>
+        </p:txBody>
+      </p:sp>
+      <p:sp>
+        <p:nvSpPr>
+          <p:cNvPr id="124" name="TextBox 123"/>
+          <p:cNvSpPr txBox="1"/>
+          <p:nvPr/>
+        </p:nvSpPr>
+        <p:spPr>
+          <a:xfrm>
+            <a:off x="10698480" y="5733288"/>
+            <a:ext cx="1097280" cy="274320"/>
+          </a:xfrm>
+          <a:prstGeom prst="rect">
+            <a:avLst/>
+          </a:prstGeom>
+          <a:noFill/>
+        </p:spPr>
+        <p:txBody>
+          <a:bodyPr wrap="square" lIns="0" rIns="0" tIns="0" bIns="0" anchor="t">
+            <a:spAutoFit/>
+          </a:bodyPr>
+          <a:lstStyle/>
+          <a:p>
+            <a:pPr algn="ctr"/>
+            <a:r>
+              <a:rPr sz="1000" b="1" i="0">
+                <a:solidFill>
+                  <a:srgbClr val="1428A0"/>
+                </a:solidFill>
+                <a:latin typeface="Calibri"/>
+              </a:rPr>
+              <a:t>✅</a:t>
+            </a:r>
+          </a:p>
+        </p:txBody>
+      </p:sp>
+      <p:sp>
+        <p:nvSpPr>
+          <p:cNvPr id="125" name="Rectangle 124"/>
+          <p:cNvSpPr/>
+          <p:nvPr/>
+        </p:nvSpPr>
+        <p:spPr>
+          <a:xfrm>
+            <a:off x="365760" y="6217920"/>
+            <a:ext cx="11430000" cy="594360"/>
+          </a:xfrm>
+          <a:prstGeom prst="rect">
+            <a:avLst/>
+          </a:prstGeom>
+          <a:solidFill>
+            <a:srgbClr val="D97706"/>
+          </a:solidFill>
+          <a:ln>
+            <a:noFill/>
+          </a:ln>
+          <a:effectLst/>
+        </p:spPr>
+        <p:style>
+          <a:lnRef idx="1">
+            <a:schemeClr val="accent1"/>
+          </a:lnRef>
+          <a:fillRef idx="3">
+            <a:schemeClr val="accent1"/>
+          </a:fillRef>
+          <a:effectRef idx="2">
+            <a:schemeClr val="accent1"/>
+          </a:effectRef>
+          <a:fontRef idx="minor">
+            <a:schemeClr val="lt1"/>
+          </a:fontRef>
+        </p:style>
+        <p:txBody>
+          <a:bodyPr rtlCol="0" anchor="ctr" lIns="0" rIns="0" tIns="0" bIns="0"/>
+          <a:lstStyle/>
+          <a:p>
+            <a:pPr algn="ctr"/>
+          </a:p>
+        </p:txBody>
+      </p:sp>
+      <p:sp>
+        <p:nvSpPr>
+          <p:cNvPr id="126" name="TextBox 125"/>
+          <p:cNvSpPr txBox="1"/>
+          <p:nvPr/>
+        </p:nvSpPr>
+        <p:spPr>
+          <a:xfrm>
+            <a:off x="548640" y="6291072"/>
+            <a:ext cx="11064240" cy="246888"/>
+          </a:xfrm>
+          <a:prstGeom prst="rect">
+            <a:avLst/>
+          </a:prstGeom>
+          <a:noFill/>
+        </p:spPr>
+        <p:txBody>
+          <a:bodyPr wrap="square" lIns="0" rIns="0" tIns="0" bIns="0" anchor="t">
+            <a:spAutoFit/>
+          </a:bodyPr>
+          <a:lstStyle/>
+          <a:p>
+            <a:pPr algn="l"/>
+            <a:r>
+              <a:rPr sz="900" b="1" i="0">
+                <a:solidFill>
+                  <a:srgbClr val="FFFFFF"/>
+                </a:solidFill>
+                <a:latin typeface="맑은 고딕"/>
+              </a:rPr>
+              <a:t>핵심 정보 공백 (⚠️ 7개): HBM P&amp;L 분리 · hybrid bonding 자체 IP · SCADA 로드맵 · 3D DRAM 전담 조직 · AEC-Q100 양산 · NIL 협력 · 다운턴 capex 하한 명문화</a:t>
+            </a:r>
+          </a:p>
+        </p:txBody>
+      </p:sp>
+      <p:sp>
+        <p:nvSpPr>
+          <p:cNvPr id="127" name="TextBox 126"/>
+          <p:cNvSpPr txBox="1"/>
+          <p:nvPr/>
+        </p:nvSpPr>
+        <p:spPr>
+          <a:xfrm>
+            <a:off x="548640" y="6547104"/>
+            <a:ext cx="11064240" cy="246888"/>
+          </a:xfrm>
+          <a:prstGeom prst="rect">
+            <a:avLst/>
+          </a:prstGeom>
+          <a:noFill/>
+        </p:spPr>
+        <p:txBody>
+          <a:bodyPr wrap="square" lIns="0" rIns="0" tIns="0" bIns="0" anchor="t">
+            <a:spAutoFit/>
+          </a:bodyPr>
+          <a:lstStyle/>
+          <a:p>
+            <a:pPr algn="l"/>
+            <a:r>
+              <a:rPr sz="850" b="0" i="1">
+                <a:solidFill>
+                  <a:srgbClr val="FFFFFF"/>
+                </a:solidFill>
+                <a:latin typeface="맑은 고딕"/>
+              </a:rPr>
+              <a:t>→ 2026 H1 Tech Day + 이사회 결의 + IR 사전 공시로 정보 공백 해소가 다음 단계의 첫 행동</a:t>
+            </a:r>
+          </a:p>
+        </p:txBody>
+      </p:sp>
+      <p:cxnSp>
+        <p:nvCxnSpPr>
+          <p:cNvPr id="128" name="Connector 127"/>
+          <p:cNvCxnSpPr/>
+          <p:nvPr/>
+        </p:nvCxnSpPr>
+        <p:spPr>
+          <a:xfrm>
+            <a:off x="457200" y="6400800"/>
+            <a:ext cx="11274552" cy="0"/>
+          </a:xfrm>
+          <a:prstGeom prst="line">
+            <a:avLst/>
+          </a:prstGeom>
+          <a:ln w="6350">
+            <a:solidFill>
+              <a:srgbClr val="D1D5DB"/>
+            </a:solidFill>
+          </a:ln>
+        </p:spPr>
+        <p:style>
+          <a:lnRef idx="2">
+            <a:schemeClr val="accent1"/>
+          </a:lnRef>
+          <a:fillRef idx="0">
+            <a:schemeClr val="accent1"/>
+          </a:fillRef>
+          <a:effectRef idx="1">
+            <a:schemeClr val="accent1"/>
+          </a:effectRef>
+          <a:fontRef idx="minor">
+            <a:schemeClr val="tx1"/>
+          </a:fontRef>
+        </p:style>
+      </p:cxnSp>
+      <p:sp>
+        <p:nvSpPr>
+          <p:cNvPr id="129" name="TextBox 128"/>
+          <p:cNvSpPr txBox="1"/>
+          <p:nvPr/>
+        </p:nvSpPr>
+        <p:spPr>
+          <a:xfrm>
+            <a:off x="457200" y="6492240"/>
+            <a:ext cx="7315200" cy="274320"/>
+          </a:xfrm>
+          <a:prstGeom prst="rect">
+            <a:avLst/>
+          </a:prstGeom>
+          <a:noFill/>
+        </p:spPr>
+        <p:txBody>
+          <a:bodyPr wrap="square" lIns="0" rIns="0" tIns="0" bIns="0" anchor="t">
+            <a:spAutoFit/>
+          </a:bodyPr>
+          <a:lstStyle/>
+          <a:p>
+            <a:pPr algn="l"/>
+            <a:r>
+              <a:rPr sz="900" b="0" i="0">
+                <a:solidFill>
+                  <a:srgbClr val="6B7280"/>
+                </a:solidFill>
+                <a:latin typeface="맑은 고딕"/>
+              </a:rPr>
+              <a:t>삼성전자  |  부록 · 현황 요약</a:t>
+            </a:r>
+          </a:p>
+        </p:txBody>
+      </p:sp>
+      <p:sp>
+        <p:nvSpPr>
+          <p:cNvPr id="130" name="TextBox 129"/>
+          <p:cNvSpPr txBox="1"/>
+          <p:nvPr/>
+        </p:nvSpPr>
+        <p:spPr>
+          <a:xfrm>
+            <a:off x="10789920" y="6492240"/>
+            <a:ext cx="914400" cy="274320"/>
+          </a:xfrm>
+          <a:prstGeom prst="rect">
+            <a:avLst/>
+          </a:prstGeom>
+          <a:noFill/>
+        </p:spPr>
+        <p:txBody>
+          <a:bodyPr wrap="square" lIns="0" rIns="0" tIns="0" bIns="0" anchor="t">
+            <a:spAutoFit/>
+          </a:bodyPr>
+          <a:lstStyle/>
+          <a:p>
+            <a:pPr algn="r"/>
+            <a:r>
+              <a:rPr sz="900" b="0" i="0">
+                <a:solidFill>
+                  <a:srgbClr val="6B7280"/>
+                </a:solidFill>
+                <a:latin typeface="맑은 고딕"/>
+              </a:rPr>
+              <a:t>5 / 5</a:t>
             </a:r>
           </a:p>
         </p:txBody>
